--- a/syllabus/15_mise_en_forme_bootstrap/syllabus_15_bootstrap.pptx
+++ b/syllabus/15_mise_en_forme_bootstrap/syllabus_15_bootstrap.pptx
@@ -5,7 +5,7 @@
     <p:sldMasterId id="2147483672" r:id="rId1"/>
   </p:sldMasterIdLst>
   <p:notesMasterIdLst>
-    <p:notesMasterId r:id="rId32"/>
+    <p:notesMasterId r:id="rId33"/>
   </p:notesMasterIdLst>
   <p:sldIdLst>
     <p:sldId id="416" r:id="rId2"/>
@@ -22,8 +22,8 @@
     <p:sldId id="542" r:id="rId13"/>
     <p:sldId id="540" r:id="rId14"/>
     <p:sldId id="267" r:id="rId15"/>
-    <p:sldId id="532" r:id="rId16"/>
-    <p:sldId id="541" r:id="rId17"/>
+    <p:sldId id="541" r:id="rId16"/>
+    <p:sldId id="532" r:id="rId17"/>
     <p:sldId id="533" r:id="rId18"/>
     <p:sldId id="260" r:id="rId19"/>
     <p:sldId id="529" r:id="rId20"/>
@@ -32,12 +32,13 @@
     <p:sldId id="530" r:id="rId23"/>
     <p:sldId id="262" r:id="rId24"/>
     <p:sldId id="269" r:id="rId25"/>
-    <p:sldId id="544" r:id="rId26"/>
-    <p:sldId id="545" r:id="rId27"/>
-    <p:sldId id="270" r:id="rId28"/>
-    <p:sldId id="546" r:id="rId29"/>
-    <p:sldId id="271" r:id="rId30"/>
-    <p:sldId id="263" r:id="rId31"/>
+    <p:sldId id="547" r:id="rId26"/>
+    <p:sldId id="544" r:id="rId27"/>
+    <p:sldId id="545" r:id="rId28"/>
+    <p:sldId id="270" r:id="rId29"/>
+    <p:sldId id="546" r:id="rId30"/>
+    <p:sldId id="271" r:id="rId31"/>
+    <p:sldId id="263" r:id="rId32"/>
   </p:sldIdLst>
   <p:sldSz cx="12192000" cy="6858000"/>
   <p:notesSz cx="6858000" cy="9144000"/>
@@ -226,7 +227,7 @@
           <a:p>
             <a:fld id="{02F74473-E200-497B-BF91-4E8E975C195C}" type="datetimeFigureOut">
               <a:rPr lang="fr-BE" smtClean="0"/>
-              <a:t>09-09-25</a:t>
+              <a:t>17-03-26</a:t>
             </a:fld>
             <a:endParaRPr lang="fr-BE"/>
           </a:p>
@@ -1130,7 +1131,7 @@
           <a:p>
             <a:fld id="{F3953782-D06E-4853-BE3C-64C197273937}" type="datetimeFigureOut">
               <a:rPr lang="fr-BE" smtClean="0"/>
-              <a:t>09-09-25</a:t>
+              <a:t>17-03-26</a:t>
             </a:fld>
             <a:endParaRPr lang="fr-BE"/>
           </a:p>
@@ -2659,7 +2660,7 @@
           <a:p>
             <a:fld id="{F3953782-D06E-4853-BE3C-64C197273937}" type="datetimeFigureOut">
               <a:rPr lang="fr-BE" smtClean="0"/>
-              <a:t>09-09-25</a:t>
+              <a:t>17-03-26</a:t>
             </a:fld>
             <a:endParaRPr lang="fr-BE"/>
           </a:p>
@@ -2975,7 +2976,7 @@
           <a:p>
             <a:fld id="{F3953782-D06E-4853-BE3C-64C197273937}" type="datetimeFigureOut">
               <a:rPr lang="fr-BE" smtClean="0"/>
-              <a:t>09-09-25</a:t>
+              <a:t>17-03-26</a:t>
             </a:fld>
             <a:endParaRPr lang="fr-BE"/>
           </a:p>
@@ -3172,7 +3173,7 @@
           <a:p>
             <a:fld id="{F3953782-D06E-4853-BE3C-64C197273937}" type="datetimeFigureOut">
               <a:rPr lang="fr-BE" smtClean="0"/>
-              <a:t>09-09-25</a:t>
+              <a:t>17-03-26</a:t>
             </a:fld>
             <a:endParaRPr lang="fr-BE"/>
           </a:p>
@@ -3434,7 +3435,7 @@
           <a:p>
             <a:fld id="{F3953782-D06E-4853-BE3C-64C197273937}" type="datetimeFigureOut">
               <a:rPr lang="fr-BE" smtClean="0"/>
-              <a:t>09-09-25</a:t>
+              <a:t>17-03-26</a:t>
             </a:fld>
             <a:endParaRPr lang="fr-BE"/>
           </a:p>
@@ -3831,7 +3832,7 @@
           <a:p>
             <a:fld id="{F3953782-D06E-4853-BE3C-64C197273937}" type="datetimeFigureOut">
               <a:rPr lang="fr-BE" smtClean="0"/>
-              <a:t>09-09-25</a:t>
+              <a:t>17-03-26</a:t>
             </a:fld>
             <a:endParaRPr lang="fr-BE"/>
           </a:p>
@@ -3979,7 +3980,7 @@
           <a:p>
             <a:fld id="{F3953782-D06E-4853-BE3C-64C197273937}" type="datetimeFigureOut">
               <a:rPr lang="fr-BE" smtClean="0"/>
-              <a:t>09-09-25</a:t>
+              <a:t>17-03-26</a:t>
             </a:fld>
             <a:endParaRPr lang="fr-BE"/>
           </a:p>
@@ -4328,7 +4329,7 @@
           <a:p>
             <a:fld id="{F3953782-D06E-4853-BE3C-64C197273937}" type="datetimeFigureOut">
               <a:rPr lang="fr-BE" smtClean="0"/>
-              <a:t>09-09-25</a:t>
+              <a:t>17-03-26</a:t>
             </a:fld>
             <a:endParaRPr lang="fr-BE"/>
           </a:p>
@@ -4654,7 +4655,7 @@
           <a:p>
             <a:fld id="{F3953782-D06E-4853-BE3C-64C197273937}" type="datetimeFigureOut">
               <a:rPr lang="fr-BE" smtClean="0"/>
-              <a:t>09-09-25</a:t>
+              <a:t>17-03-26</a:t>
             </a:fld>
             <a:endParaRPr lang="fr-BE"/>
           </a:p>
@@ -5266,7 +5267,7 @@
         <p14:reveal/>
       </p:transition>
     </mc:Choice>
-    <mc:Fallback xmlns="" xmlns:mv="urn:schemas-microsoft-com:mac:vml" xmlns:c="http://schemas.openxmlformats.org/drawingml/2006/chart" xmlns:dgm="http://schemas.openxmlformats.org/drawingml/2006/diagram" xmlns:o="urn:schemas-microsoft-com:office:office" xmlns:v="urn:schemas-microsoft-com:vml" xmlns:pvml="urn:schemas-microsoft-com:office:powerpoint" xmlns:com="http://schemas.openxmlformats.org/drawingml/2006/compatibility" xmlns:p15="http://schemas.microsoft.com/office/powerpoint/2012/main" xmlns:ahyp="http://schemas.microsoft.com/office/drawing/2018/hyperlinkcolor">
+    <mc:Fallback xmlns:ahyp="http://schemas.microsoft.com/office/drawing/2018/hyperlinkcolor" xmlns:p15="http://schemas.microsoft.com/office/powerpoint/2012/main" xmlns:com="http://schemas.openxmlformats.org/drawingml/2006/compatibility" xmlns:pvml="urn:schemas-microsoft-com:office:powerpoint" xmlns:v="urn:schemas-microsoft-com:vml" xmlns:o="urn:schemas-microsoft-com:office:office" xmlns:dgm="http://schemas.openxmlformats.org/drawingml/2006/diagram" xmlns:c="http://schemas.openxmlformats.org/drawingml/2006/chart" xmlns:mv="urn:schemas-microsoft-com:mac:vml" xmlns="">
       <p:transition spd="med">
         <p:fade/>
       </p:transition>
@@ -5337,10 +5338,15 @@
             <p:ph idx="1"/>
           </p:nvPr>
         </p:nvSpPr>
-        <p:spPr/>
+        <p:spPr>
+          <a:xfrm>
+            <a:off x="838200" y="1690689"/>
+            <a:ext cx="11098876" cy="4486276"/>
+          </a:xfrm>
+        </p:spPr>
         <p:txBody>
           <a:bodyPr>
-            <a:normAutofit fontScale="92500" lnSpcReduction="10000"/>
+            <a:normAutofit fontScale="92500" lnSpcReduction="20000"/>
           </a:bodyPr>
           <a:lstStyle/>
           <a:p>
@@ -5352,15 +5358,33 @@
           <a:p>
             <a:pPr lvl="1"/>
             <a:r>
-              <a:rPr lang="fr-BE"/>
-              <a:t>Viewport : la surface de la fenêtre du navigateur.</a:t>
+              <a:rPr lang="fr-BE">
+                <a:solidFill>
+                  <a:srgbClr val="996633"/>
+                </a:solidFill>
+                <a:latin typeface="Consolas" panose="020B0609020204030204" pitchFamily="49" charset="0"/>
+              </a:rPr>
+              <a:t>viewport</a:t>
+            </a:r>
+            <a:r>
+              <a:rPr lang="fr-BE"/>
+              <a:t> : la surface de la fenêtre du navigateur.</a:t>
             </a:r>
           </a:p>
           <a:p>
             <a:pPr lvl="1"/>
             <a:r>
-              <a:rPr lang="fr-BE"/>
-              <a:t>width : taille du viewport</a:t>
+              <a:rPr lang="fr-BE">
+                <a:solidFill>
+                  <a:srgbClr val="996633"/>
+                </a:solidFill>
+                <a:latin typeface="Consolas" panose="020B0609020204030204" pitchFamily="49" charset="0"/>
+              </a:rPr>
+              <a:t>width</a:t>
+            </a:r>
+            <a:r>
+              <a:rPr lang="fr-BE"/>
+              <a:t> : taille du viewport</a:t>
             </a:r>
           </a:p>
           <a:p>
@@ -5380,8 +5404,17 @@
           <a:p>
             <a:pPr lvl="1"/>
             <a:r>
-              <a:rPr lang="fr-BE"/>
-              <a:t>initial-scale : niveau de zoom</a:t>
+              <a:rPr lang="fr-BE">
+                <a:solidFill>
+                  <a:srgbClr val="996633"/>
+                </a:solidFill>
+                <a:latin typeface="Consolas" panose="020B0609020204030204" pitchFamily="49" charset="0"/>
+              </a:rPr>
+              <a:t>initial-scale</a:t>
+            </a:r>
+            <a:r>
+              <a:rPr lang="fr-BE"/>
+              <a:t> : niveau de zoom</a:t>
             </a:r>
           </a:p>
           <a:p>
@@ -5414,7 +5447,7 @@
               <a:buNone/>
             </a:pPr>
             <a:r>
-              <a:rPr lang="en-US" sz="2600" b="1">
+              <a:rPr lang="en-US" sz="3000" b="1">
                 <a:solidFill>
                   <a:schemeClr val="accent6">
                     <a:lumMod val="50000"/>
@@ -5423,15 +5456,10 @@
                 <a:latin typeface="Courier New" panose="02070309020205020404" pitchFamily="49" charset="0"/>
                 <a:cs typeface="Courier New" panose="02070309020205020404" pitchFamily="49" charset="0"/>
               </a:rPr>
-              <a:t>&lt;meta name="viewport" </a:t>
-            </a:r>
-          </a:p>
-          <a:p>
-            <a:pPr marL="457189" lvl="1" indent="0">
-              <a:buNone/>
-            </a:pPr>
-            <a:r>
-              <a:rPr lang="en-US" sz="2600" b="1">
+              <a:t>&lt;meta </a:t>
+            </a:r>
+            <a:br>
+              <a:rPr lang="en-US" sz="3000" b="1">
                 <a:solidFill>
                   <a:schemeClr val="accent6">
                     <a:lumMod val="50000"/>
@@ -5440,7 +5468,41 @@
                 <a:latin typeface="Courier New" panose="02070309020205020404" pitchFamily="49" charset="0"/>
                 <a:cs typeface="Courier New" panose="02070309020205020404" pitchFamily="49" charset="0"/>
               </a:rPr>
-              <a:t>      content="width=device-width, initial-scale=1"&gt;</a:t>
+            </a:br>
+            <a:r>
+              <a:rPr lang="en-US" sz="3000" b="1">
+                <a:solidFill>
+                  <a:schemeClr val="accent6">
+                    <a:lumMod val="50000"/>
+                  </a:schemeClr>
+                </a:solidFill>
+                <a:latin typeface="Courier New" panose="02070309020205020404" pitchFamily="49" charset="0"/>
+                <a:cs typeface="Courier New" panose="02070309020205020404" pitchFamily="49" charset="0"/>
+              </a:rPr>
+              <a:t>  name="viewport" </a:t>
+            </a:r>
+            <a:br>
+              <a:rPr lang="en-US" sz="3000" b="1">
+                <a:solidFill>
+                  <a:schemeClr val="accent6">
+                    <a:lumMod val="50000"/>
+                  </a:schemeClr>
+                </a:solidFill>
+                <a:latin typeface="Courier New" panose="02070309020205020404" pitchFamily="49" charset="0"/>
+                <a:cs typeface="Courier New" panose="02070309020205020404" pitchFamily="49" charset="0"/>
+              </a:rPr>
+            </a:br>
+            <a:r>
+              <a:rPr lang="en-US" sz="3000" b="1">
+                <a:solidFill>
+                  <a:schemeClr val="accent6">
+                    <a:lumMod val="50000"/>
+                  </a:schemeClr>
+                </a:solidFill>
+                <a:latin typeface="Courier New" panose="02070309020205020404" pitchFamily="49" charset="0"/>
+                <a:cs typeface="Courier New" panose="02070309020205020404" pitchFamily="49" charset="0"/>
+              </a:rPr>
+              <a:t>  content="width=device-width, initial-scale=1"&gt;</a:t>
             </a:r>
           </a:p>
           <a:p>
@@ -5587,7 +5649,7 @@
               <a:buNone/>
             </a:pPr>
             <a:r>
-              <a:rPr lang="fr-BE" sz="2400" b="1">
+              <a:rPr lang="fr-BE" sz="2800" b="1">
                 <a:solidFill>
                   <a:schemeClr val="accent6">
                     <a:lumMod val="50000"/>
@@ -5596,7 +5658,53 @@
                 <a:latin typeface="Courier New" panose="02070309020205020404" pitchFamily="49" charset="0"/>
                 <a:cs typeface="Courier New" panose="02070309020205020404" pitchFamily="49" charset="0"/>
               </a:rPr>
-              <a:t>&lt;link href="css/mes_styles.css" rel="stylesheet"&gt;</a:t>
+              <a:t>&lt;link </a:t>
+            </a:r>
+            <a:br>
+              <a:rPr lang="fr-BE" sz="2800" b="1">
+                <a:solidFill>
+                  <a:schemeClr val="accent6">
+                    <a:lumMod val="50000"/>
+                  </a:schemeClr>
+                </a:solidFill>
+                <a:latin typeface="Courier New" panose="02070309020205020404" pitchFamily="49" charset="0"/>
+                <a:cs typeface="Courier New" panose="02070309020205020404" pitchFamily="49" charset="0"/>
+              </a:rPr>
+            </a:br>
+            <a:r>
+              <a:rPr lang="fr-BE" sz="2800" b="1">
+                <a:solidFill>
+                  <a:schemeClr val="accent6">
+                    <a:lumMod val="50000"/>
+                  </a:schemeClr>
+                </a:solidFill>
+                <a:latin typeface="Courier New" panose="02070309020205020404" pitchFamily="49" charset="0"/>
+                <a:cs typeface="Courier New" panose="02070309020205020404" pitchFamily="49" charset="0"/>
+              </a:rPr>
+              <a:t>	href="css/mes_styles.css" </a:t>
+            </a:r>
+            <a:br>
+              <a:rPr lang="fr-BE" sz="2800" b="1">
+                <a:solidFill>
+                  <a:schemeClr val="accent6">
+                    <a:lumMod val="50000"/>
+                  </a:schemeClr>
+                </a:solidFill>
+                <a:latin typeface="Courier New" panose="02070309020205020404" pitchFamily="49" charset="0"/>
+                <a:cs typeface="Courier New" panose="02070309020205020404" pitchFamily="49" charset="0"/>
+              </a:rPr>
+            </a:br>
+            <a:r>
+              <a:rPr lang="fr-BE" sz="2800" b="1">
+                <a:solidFill>
+                  <a:schemeClr val="accent6">
+                    <a:lumMod val="50000"/>
+                  </a:schemeClr>
+                </a:solidFill>
+                <a:latin typeface="Courier New" panose="02070309020205020404" pitchFamily="49" charset="0"/>
+                <a:cs typeface="Courier New" panose="02070309020205020404" pitchFamily="49" charset="0"/>
+              </a:rPr>
+              <a:t>	rel="stylesheet"&gt;</a:t>
             </a:r>
           </a:p>
           <a:p>
@@ -5815,19 +5923,7 @@
                 <a:latin typeface="Courier New" panose="02070309020205020404" pitchFamily="49" charset="0"/>
                 <a:cs typeface="Courier New" panose="02070309020205020404" pitchFamily="49" charset="0"/>
               </a:rPr>
-              <a:t>    &lt;meta name="viewport" content="width=device-width, initial-</a:t>
-            </a:r>
-            <a:r>
-              <a:rPr lang="fr-BE" b="1">
-                <a:solidFill>
-                  <a:schemeClr val="accent6">
-                    <a:lumMod val="50000"/>
-                  </a:schemeClr>
-                </a:solidFill>
-                <a:latin typeface="Courier New" panose="02070309020205020404" pitchFamily="49" charset="0"/>
-                <a:cs typeface="Courier New" panose="02070309020205020404" pitchFamily="49" charset="0"/>
-              </a:rPr>
-              <a:t>scale=1"&gt;</a:t>
+              <a:t>    &lt;meta name="viewport" content="width=device-width, initial-scale=1"&gt;</a:t>
             </a:r>
           </a:p>
           <a:p>
@@ -5860,24 +5956,12 @@
             <a:r>
               <a:rPr lang="fr-BE" b="1">
                 <a:solidFill>
-                  <a:schemeClr val="accent6">
-                    <a:lumMod val="50000"/>
-                  </a:schemeClr>
+                  <a:schemeClr val="accent2"/>
                 </a:solidFill>
                 <a:latin typeface="Courier New" panose="02070309020205020404" pitchFamily="49" charset="0"/>
                 <a:cs typeface="Courier New" panose="02070309020205020404" pitchFamily="49" charset="0"/>
               </a:rPr>
-              <a:t>    </a:t>
-            </a:r>
-            <a:r>
-              <a:rPr lang="fr-BE" b="1">
-                <a:solidFill>
-                  <a:schemeClr val="accent2"/>
-                </a:solidFill>
-                <a:latin typeface="Courier New" panose="02070309020205020404" pitchFamily="49" charset="0"/>
-                <a:cs typeface="Courier New" panose="02070309020205020404" pitchFamily="49" charset="0"/>
-              </a:rPr>
-              <a:t>&lt;link href="https://cdn.jsdelivr.net/npm/bootstrap@5.1.3/dist/css/bootstrap.min.css" rel="stylesheet" integrity="sha384-1BmE4kWBq78iYhFldvKuhfTAU6auU8tT94WrHftjDbrCEXSU1oBoqyl2QvZ6jIW3" crossorigin="anonymous"&gt;</a:t>
+              <a:t>    &lt;link href="https://cdn.jsdelivr.net/npm/bootstrap@5.3.8/dist/css/bootstrap.min.css" rel="stylesheet" integrity="sha384-sRIl4kxILFvY47J16cr9ZwB07vP4J8+LH7qKQnuqkuIAvNWLzeN8tE5YBujZqJLB" crossorigin="anonymous" &gt;</a:t>
             </a:r>
           </a:p>
           <a:p>
@@ -6067,7 +6151,7 @@
           <a:p>
             <a:r>
               <a:rPr lang="fr-FR"/>
-              <a:t>Layout</a:t>
+              <a:t>Bootstrap : mise en page</a:t>
             </a:r>
             <a:endParaRPr lang="fr-BE"/>
           </a:p>
@@ -6091,10 +6175,37 @@
         </p:nvSpPr>
         <p:spPr/>
         <p:txBody>
-          <a:bodyPr/>
+          <a:bodyPr numCol="3"/>
           <a:lstStyle/>
           <a:p>
-            <a:endParaRPr lang="fr-BE"/>
+            <a:r>
+              <a:rPr lang="fr-BE"/>
+              <a:t>container</a:t>
+            </a:r>
+          </a:p>
+          <a:p>
+            <a:r>
+              <a:rPr lang="fr-BE"/>
+              <a:t>row</a:t>
+            </a:r>
+          </a:p>
+          <a:p>
+            <a:r>
+              <a:rPr lang="fr-BE"/>
+              <a:t>col</a:t>
+            </a:r>
+          </a:p>
+          <a:p>
+            <a:r>
+              <a:rPr lang="fr-BE"/>
+              <a:t>layout</a:t>
+            </a:r>
+          </a:p>
+          <a:p>
+            <a:r>
+              <a:rPr lang="fr-BE"/>
+              <a:t>breakpoint</a:t>
+            </a:r>
           </a:p>
         </p:txBody>
       </p:sp>
@@ -6232,7 +6343,7 @@
         <p:spPr/>
         <p:txBody>
           <a:bodyPr>
-            <a:normAutofit fontScale="85000" lnSpcReduction="10000"/>
+            <a:normAutofit fontScale="85000" lnSpcReduction="20000"/>
           </a:bodyPr>
           <a:lstStyle/>
           <a:p>
@@ -6286,7 +6397,7 @@
             <a:pPr lvl="1"/>
             <a:r>
               <a:rPr lang="fr-BE"/>
-              <a:t>point de rupture dans la mise en page </a:t>
+              <a:t>point de rupture en largeur dans la mise en page </a:t>
             </a:r>
           </a:p>
           <a:p>
@@ -6294,6 +6405,13 @@
             <a:r>
               <a:rPr lang="fr-BE"/>
               <a:t>(re)positionnement ou (ré)organisation des éléments, fonction de la taille de l'écran</a:t>
+            </a:r>
+          </a:p>
+          <a:p>
+            <a:pPr lvl="1"/>
+            <a:r>
+              <a:rPr lang="fr-BE"/>
+              <a:t>différents seuils de largeur </a:t>
             </a:r>
           </a:p>
           <a:p>
@@ -6331,121 +6449,6 @@
 </file>
 
 <file path=ppt/slides/slide15.xml><?xml version="1.0" encoding="utf-8"?>
-<p:sld xmlns:a="http://schemas.openxmlformats.org/drawingml/2006/main" xmlns:r="http://schemas.openxmlformats.org/officeDocument/2006/relationships" xmlns:p="http://schemas.openxmlformats.org/presentationml/2006/main">
-  <p:cSld>
-    <p:spTree>
-      <p:nvGrpSpPr>
-        <p:cNvPr id="1" name=""/>
-        <p:cNvGrpSpPr/>
-        <p:nvPr/>
-      </p:nvGrpSpPr>
-      <p:grpSpPr>
-        <a:xfrm>
-          <a:off x="0" y="0"/>
-          <a:ext cx="0" cy="0"/>
-          <a:chOff x="0" y="0"/>
-          <a:chExt cx="0" cy="0"/>
-        </a:xfrm>
-      </p:grpSpPr>
-      <p:sp>
-        <p:nvSpPr>
-          <p:cNvPr id="2" name="Titre 1">
-            <a:extLst>
-              <a:ext uri="{FF2B5EF4-FFF2-40B4-BE49-F238E27FC236}">
-                <a16:creationId xmlns:a16="http://schemas.microsoft.com/office/drawing/2014/main" id="{B1DE05C2-EFB5-E4FA-1ED0-F2A705C2C53A}"/>
-              </a:ext>
-            </a:extLst>
-          </p:cNvPr>
-          <p:cNvSpPr>
-            <a:spLocks noGrp="1"/>
-          </p:cNvSpPr>
-          <p:nvPr>
-            <p:ph type="title"/>
-          </p:nvPr>
-        </p:nvSpPr>
-        <p:spPr/>
-        <p:txBody>
-          <a:bodyPr/>
-          <a:lstStyle/>
-          <a:p>
-            <a:r>
-              <a:rPr lang="fr-BE"/>
-              <a:t>Layout : 12 colonnes par rangée </a:t>
-            </a:r>
-          </a:p>
-        </p:txBody>
-      </p:sp>
-      <p:pic>
-        <p:nvPicPr>
-          <p:cNvPr id="1026" name="Picture 2" descr="Le système de grille Bootstrap">
-            <a:extLst>
-              <a:ext uri="{FF2B5EF4-FFF2-40B4-BE49-F238E27FC236}">
-                <a16:creationId xmlns:a16="http://schemas.microsoft.com/office/drawing/2014/main" id="{E8F1B31C-2AFE-AE9A-4744-E1634C0AE0AA}"/>
-              </a:ext>
-            </a:extLst>
-          </p:cNvPr>
-          <p:cNvPicPr>
-            <a:picLocks noGrp="1" noChangeAspect="1" noChangeArrowheads="1"/>
-          </p:cNvPicPr>
-          <p:nvPr>
-            <p:ph idx="1"/>
-          </p:nvPr>
-        </p:nvPicPr>
-        <p:blipFill>
-          <a:blip r:embed="rId2">
-            <a:clrChange>
-              <a:clrFrom>
-                <a:srgbClr val="FFFFFF"/>
-              </a:clrFrom>
-              <a:clrTo>
-                <a:srgbClr val="FFFFFF">
-                  <a:alpha val="0"/>
-                </a:srgbClr>
-              </a:clrTo>
-            </a:clrChange>
-            <a:extLst>
-              <a:ext uri="{28A0092B-C50C-407E-A947-70E740481C1C}">
-                <a14:useLocalDpi xmlns:a14="http://schemas.microsoft.com/office/drawing/2010/main" val="0"/>
-              </a:ext>
-            </a:extLst>
-          </a:blip>
-          <a:stretch>
-            <a:fillRect/>
-          </a:stretch>
-        </p:blipFill>
-        <p:spPr>
-          <a:xfrm>
-            <a:off x="2352334" y="1690688"/>
-            <a:ext cx="7487332" cy="4486275"/>
-          </a:xfrm>
-        </p:spPr>
-      </p:pic>
-    </p:spTree>
-    <p:extLst>
-      <p:ext uri="{BB962C8B-B14F-4D97-AF65-F5344CB8AC3E}">
-        <p14:creationId xmlns:p14="http://schemas.microsoft.com/office/powerpoint/2010/main" val="748891551"/>
-      </p:ext>
-    </p:extLst>
-  </p:cSld>
-  <p:clrMapOvr>
-    <a:masterClrMapping/>
-  </p:clrMapOvr>
-  <mc:AlternateContent xmlns:mc="http://schemas.openxmlformats.org/markup-compatibility/2006" xmlns:p14="http://schemas.microsoft.com/office/powerpoint/2010/main">
-    <mc:Choice Requires="p14">
-      <p:transition spd="slow">
-        <p14:reveal/>
-      </p:transition>
-    </mc:Choice>
-    <mc:Fallback xmlns="">
-      <p:transition spd="slow">
-        <p:fade/>
-      </p:transition>
-    </mc:Fallback>
-  </mc:AlternateContent>
-</p:sld>
-</file>
-
-<file path=ppt/slides/slide16.xml><?xml version="1.0" encoding="utf-8"?>
 <p:sld xmlns:a="http://schemas.openxmlformats.org/drawingml/2006/main" xmlns:r="http://schemas.openxmlformats.org/officeDocument/2006/relationships" xmlns:p="http://schemas.openxmlformats.org/presentationml/2006/main">
   <p:cSld>
     <p:bg>
@@ -6493,7 +6496,7 @@
           <a:p>
             <a:r>
               <a:rPr lang="fr-FR"/>
-              <a:t>Layout : les tailles d'écran</a:t>
+              <a:t>Breakpoint : les tailles d'écran</a:t>
             </a:r>
             <a:endParaRPr lang="fr-BE"/>
           </a:p>
@@ -6514,14 +6517,14 @@
           <p:nvPr>
             <p:extLst>
               <p:ext uri="{D42A27DB-BD31-4B8C-83A1-F6EECF244321}">
-                <p14:modId xmlns:p14="http://schemas.microsoft.com/office/powerpoint/2010/main" val="426220556"/>
+                <p14:modId xmlns:p14="http://schemas.microsoft.com/office/powerpoint/2010/main" val="1475368671"/>
               </p:ext>
             </p:extLst>
           </p:nvPr>
         </p:nvGraphicFramePr>
         <p:xfrm>
           <a:off x="609600" y="1845426"/>
-          <a:ext cx="11049000" cy="4206405"/>
+          <a:ext cx="11049000" cy="4409706"/>
         </p:xfrm>
         <a:graphic>
           <a:graphicData uri="http://schemas.openxmlformats.org/drawingml/2006/table">
@@ -6544,14 +6547,14 @@
                     </a:ext>
                   </a:extLst>
                 </a:gridCol>
-                <a:gridCol w="2905310">
+                <a:gridCol w="2557693">
                   <a:extLst>
                     <a:ext uri="{9D8B030D-6E8A-4147-A177-3AD203B41FA5}">
                       <a16:colId xmlns:a16="http://schemas.microsoft.com/office/drawing/2014/main" val="2916397253"/>
                     </a:ext>
                   </a:extLst>
                 </a:gridCol>
-                <a:gridCol w="2665747">
+                <a:gridCol w="3013364">
                   <a:extLst>
                     <a:ext uri="{9D8B030D-6E8A-4147-A177-3AD203B41FA5}">
                       <a16:colId xmlns:a16="http://schemas.microsoft.com/office/drawing/2014/main" val="2438310021"/>
@@ -6705,7 +6708,7 @@
                     <a:p>
                       <a:r>
                         <a:rPr lang="fr-FR" sz="2300"/>
-                        <a:t>smartphone</a:t>
+                        <a:t>smartphone vertical</a:t>
                       </a:r>
                       <a:endParaRPr lang="fr-BE" sz="2300">
                         <a:latin typeface="Garamond" panose="02020404030301010803" pitchFamily="18" charset="0"/>
@@ -6826,6 +6829,23 @@
                         </a:rPr>
                         <a:t>tablette</a:t>
                       </a:r>
+                      <a:br>
+                        <a:rPr lang="fr-FR" sz="2300" b="0">
+                          <a:solidFill>
+                            <a:srgbClr val="374151"/>
+                          </a:solidFill>
+                          <a:effectLst/>
+                        </a:rPr>
+                      </a:br>
+                      <a:r>
+                        <a:rPr lang="fr-FR" sz="2300" b="0">
+                          <a:solidFill>
+                            <a:srgbClr val="374151"/>
+                          </a:solidFill>
+                          <a:effectLst/>
+                        </a:rPr>
+                        <a:t>smartphone horizontal</a:t>
+                      </a:r>
                       <a:endParaRPr lang="fr-BE" sz="2300" b="0" i="0">
                         <a:solidFill>
                           <a:srgbClr val="374151"/>
@@ -6914,7 +6934,7 @@
                     <a:p>
                       <a:r>
                         <a:rPr lang="fr-FR" sz="2300"/>
-                        <a:t>laptop</a:t>
+                        <a:t>tablette </a:t>
                       </a:r>
                       <a:endParaRPr lang="fr-BE" sz="2300">
                         <a:latin typeface="Garamond" panose="02020404030301010803" pitchFamily="18" charset="0"/>
@@ -7031,21 +7051,15 @@
                     <a:p>
                       <a:pPr lvl="0"/>
                       <a:r>
-                        <a:rPr lang="fr-FR" sz="2300" b="0">
+                        <a:rPr lang="fr-BE" sz="2300" b="0" i="0">
                           <a:solidFill>
                             <a:srgbClr val="374151"/>
                           </a:solidFill>
                           <a:effectLst/>
+                          <a:latin typeface="Garamond" panose="02020404030301010803" pitchFamily="18" charset="0"/>
                         </a:rPr>
-                        <a:t>desktop</a:t>
+                        <a:t>laptop</a:t>
                       </a:r>
-                      <a:endParaRPr lang="fr-BE" sz="2300" b="0" i="0">
-                        <a:solidFill>
-                          <a:srgbClr val="374151"/>
-                        </a:solidFill>
-                        <a:effectLst/>
-                        <a:latin typeface="Garamond" panose="02020404030301010803" pitchFamily="18" charset="0"/>
-                      </a:endParaRPr>
                     </a:p>
                   </a:txBody>
                   <a:tcPr marL="103175" marR="103175" marT="51588" marB="51588"/>
@@ -7160,15 +7174,6 @@
                           <a:effectLst/>
                         </a:rPr>
                         <a:t>desktop</a:t>
-                      </a:r>
-                      <a:r>
-                        <a:rPr lang="fr-BE" sz="2300" b="0">
-                          <a:solidFill>
-                            <a:srgbClr val="374151"/>
-                          </a:solidFill>
-                          <a:effectLst/>
-                        </a:rPr>
-                        <a:t> à écran large </a:t>
                       </a:r>
                       <a:endParaRPr lang="fr-BE" sz="2300" b="0" i="0">
                         <a:solidFill>
@@ -7335,10 +7340,160 @@
           </a:graphicData>
         </a:graphic>
       </p:graphicFrame>
+      <p:sp>
+        <p:nvSpPr>
+          <p:cNvPr id="3" name="ZoneTexte 2">
+            <a:extLst>
+              <a:ext uri="{FF2B5EF4-FFF2-40B4-BE49-F238E27FC236}">
+                <a16:creationId xmlns:a16="http://schemas.microsoft.com/office/drawing/2014/main" id="{5AE117F4-ACAE-132E-4B31-2917A2CD9B0A}"/>
+              </a:ext>
+            </a:extLst>
+          </p:cNvPr>
+          <p:cNvSpPr txBox="1"/>
+          <p:nvPr/>
+        </p:nvSpPr>
+        <p:spPr>
+          <a:xfrm>
+            <a:off x="631778" y="6359236"/>
+            <a:ext cx="9227128" cy="461665"/>
+          </a:xfrm>
+          <a:prstGeom prst="rect">
+            <a:avLst/>
+          </a:prstGeom>
+          <a:noFill/>
+        </p:spPr>
+        <p:txBody>
+          <a:bodyPr wrap="square" rtlCol="0">
+            <a:spAutoFit/>
+          </a:bodyPr>
+          <a:lstStyle/>
+          <a:p>
+            <a:r>
+              <a:rPr lang="fr-BE"/>
+              <a:t>Remarque : défaut = xs; surcharge pour sm, md, etc. </a:t>
+            </a:r>
+          </a:p>
+        </p:txBody>
+      </p:sp>
     </p:spTree>
     <p:extLst>
       <p:ext uri="{BB962C8B-B14F-4D97-AF65-F5344CB8AC3E}">
         <p14:creationId xmlns:p14="http://schemas.microsoft.com/office/powerpoint/2010/main" val="798272893"/>
+      </p:ext>
+    </p:extLst>
+  </p:cSld>
+  <p:clrMapOvr>
+    <a:masterClrMapping/>
+  </p:clrMapOvr>
+  <mc:AlternateContent xmlns:mc="http://schemas.openxmlformats.org/markup-compatibility/2006" xmlns:p14="http://schemas.microsoft.com/office/powerpoint/2010/main">
+    <mc:Choice Requires="p14">
+      <p:transition spd="slow">
+        <p14:reveal/>
+      </p:transition>
+    </mc:Choice>
+    <mc:Fallback xmlns="">
+      <p:transition spd="slow">
+        <p:fade/>
+      </p:transition>
+    </mc:Fallback>
+  </mc:AlternateContent>
+</p:sld>
+</file>
+
+<file path=ppt/slides/slide16.xml><?xml version="1.0" encoding="utf-8"?>
+<p:sld xmlns:a="http://schemas.openxmlformats.org/drawingml/2006/main" xmlns:r="http://schemas.openxmlformats.org/officeDocument/2006/relationships" xmlns:p="http://schemas.openxmlformats.org/presentationml/2006/main">
+  <p:cSld>
+    <p:spTree>
+      <p:nvGrpSpPr>
+        <p:cNvPr id="1" name=""/>
+        <p:cNvGrpSpPr/>
+        <p:nvPr/>
+      </p:nvGrpSpPr>
+      <p:grpSpPr>
+        <a:xfrm>
+          <a:off x="0" y="0"/>
+          <a:ext cx="0" cy="0"/>
+          <a:chOff x="0" y="0"/>
+          <a:chExt cx="0" cy="0"/>
+        </a:xfrm>
+      </p:grpSpPr>
+      <p:sp>
+        <p:nvSpPr>
+          <p:cNvPr id="2" name="Titre 1">
+            <a:extLst>
+              <a:ext uri="{FF2B5EF4-FFF2-40B4-BE49-F238E27FC236}">
+                <a16:creationId xmlns:a16="http://schemas.microsoft.com/office/drawing/2014/main" id="{B1DE05C2-EFB5-E4FA-1ED0-F2A705C2C53A}"/>
+              </a:ext>
+            </a:extLst>
+          </p:cNvPr>
+          <p:cNvSpPr>
+            <a:spLocks noGrp="1"/>
+          </p:cNvSpPr>
+          <p:nvPr>
+            <p:ph type="title"/>
+          </p:nvPr>
+        </p:nvSpPr>
+        <p:spPr/>
+        <p:txBody>
+          <a:bodyPr/>
+          <a:lstStyle/>
+          <a:p>
+            <a:r>
+              <a:rPr lang="fr-BE"/>
+              <a:t>Layout : 12 colonnes par rangée </a:t>
+            </a:r>
+          </a:p>
+        </p:txBody>
+      </p:sp>
+      <p:pic>
+        <p:nvPicPr>
+          <p:cNvPr id="1026" name="Picture 2" descr="Le système de grille Bootstrap">
+            <a:extLst>
+              <a:ext uri="{FF2B5EF4-FFF2-40B4-BE49-F238E27FC236}">
+                <a16:creationId xmlns:a16="http://schemas.microsoft.com/office/drawing/2014/main" id="{E8F1B31C-2AFE-AE9A-4744-E1634C0AE0AA}"/>
+              </a:ext>
+            </a:extLst>
+          </p:cNvPr>
+          <p:cNvPicPr>
+            <a:picLocks noGrp="1" noChangeAspect="1" noChangeArrowheads="1"/>
+          </p:cNvPicPr>
+          <p:nvPr>
+            <p:ph idx="1"/>
+          </p:nvPr>
+        </p:nvPicPr>
+        <p:blipFill>
+          <a:blip r:embed="rId2">
+            <a:clrChange>
+              <a:clrFrom>
+                <a:srgbClr val="FFFFFF"/>
+              </a:clrFrom>
+              <a:clrTo>
+                <a:srgbClr val="FFFFFF">
+                  <a:alpha val="0"/>
+                </a:srgbClr>
+              </a:clrTo>
+            </a:clrChange>
+            <a:extLst>
+              <a:ext uri="{28A0092B-C50C-407E-A947-70E740481C1C}">
+                <a14:useLocalDpi xmlns:a14="http://schemas.microsoft.com/office/drawing/2010/main" val="0"/>
+              </a:ext>
+            </a:extLst>
+          </a:blip>
+          <a:stretch>
+            <a:fillRect/>
+          </a:stretch>
+        </p:blipFill>
+        <p:spPr>
+          <a:xfrm>
+            <a:off x="2352334" y="1690688"/>
+            <a:ext cx="7487332" cy="4486275"/>
+          </a:xfrm>
+        </p:spPr>
+      </p:pic>
+    </p:spTree>
+    <p:extLst>
+      <p:ext uri="{BB962C8B-B14F-4D97-AF65-F5344CB8AC3E}">
+        <p14:creationId xmlns:p14="http://schemas.microsoft.com/office/powerpoint/2010/main" val="748891551"/>
       </p:ext>
     </p:extLst>
   </p:cSld>
@@ -7458,6 +7613,80 @@
           </a:prstGeom>
         </p:spPr>
       </p:pic>
+      <p:sp>
+        <p:nvSpPr>
+          <p:cNvPr id="3" name="ZoneTexte 2">
+            <a:extLst>
+              <a:ext uri="{FF2B5EF4-FFF2-40B4-BE49-F238E27FC236}">
+                <a16:creationId xmlns:a16="http://schemas.microsoft.com/office/drawing/2014/main" id="{725FFD31-5C47-0F34-A9BD-45696CB8C907}"/>
+              </a:ext>
+            </a:extLst>
+          </p:cNvPr>
+          <p:cNvSpPr txBox="1"/>
+          <p:nvPr/>
+        </p:nvSpPr>
+        <p:spPr>
+          <a:xfrm>
+            <a:off x="980901" y="5167311"/>
+            <a:ext cx="9343506" cy="1384995"/>
+          </a:xfrm>
+          <a:prstGeom prst="rect">
+            <a:avLst/>
+          </a:prstGeom>
+          <a:noFill/>
+        </p:spPr>
+        <p:txBody>
+          <a:bodyPr wrap="square" rtlCol="0">
+            <a:spAutoFit/>
+          </a:bodyPr>
+          <a:lstStyle/>
+          <a:p>
+            <a:r>
+              <a:rPr lang="fr-BE" sz="2800"/>
+              <a:t>Remarque : </a:t>
+            </a:r>
+            <a:r>
+              <a:rPr lang="fr-BE" sz="2800">
+                <a:solidFill>
+                  <a:srgbClr val="996633"/>
+                </a:solidFill>
+                <a:latin typeface="Consolas" panose="020B0609020204030204" pitchFamily="49" charset="0"/>
+              </a:rPr>
+              <a:t>&lt;div&gt;</a:t>
+            </a:r>
+            <a:r>
+              <a:rPr lang="fr-BE" sz="2800"/>
+              <a:t> peut être remplacé par toute autre balise "display:block", comme les balises HTML 5 : </a:t>
+            </a:r>
+            <a:r>
+              <a:rPr lang="fr-BE" sz="2800">
+                <a:solidFill>
+                  <a:srgbClr val="996633"/>
+                </a:solidFill>
+                <a:latin typeface="Consolas" panose="020B0609020204030204" pitchFamily="49" charset="0"/>
+              </a:rPr>
+              <a:t>&lt;main&gt;</a:t>
+            </a:r>
+            <a:r>
+              <a:rPr lang="fr-BE" sz="2800"/>
+              <a:t>, </a:t>
+            </a:r>
+            <a:r>
+              <a:rPr lang="fr-BE" sz="2800">
+                <a:solidFill>
+                  <a:srgbClr val="996633"/>
+                </a:solidFill>
+                <a:latin typeface="Consolas" panose="020B0609020204030204" pitchFamily="49" charset="0"/>
+              </a:rPr>
+              <a:t>&lt;section&gt;</a:t>
+            </a:r>
+            <a:r>
+              <a:rPr lang="fr-BE" sz="2800"/>
+              <a:t>, etc. </a:t>
+            </a:r>
+          </a:p>
+        </p:txBody>
+      </p:sp>
     </p:spTree>
     <p:extLst>
       <p:ext uri="{BB962C8B-B14F-4D97-AF65-F5344CB8AC3E}">
@@ -8705,7 +8934,7 @@
         <p14:reveal/>
       </p:transition>
     </mc:Choice>
-    <mc:Fallback xmlns:ahyp="http://schemas.microsoft.com/office/drawing/2018/hyperlinkcolor" xmlns:p15="http://schemas.microsoft.com/office/powerpoint/2012/main" xmlns:com="http://schemas.openxmlformats.org/drawingml/2006/compatibility" xmlns:pvml="urn:schemas-microsoft-com:office:powerpoint" xmlns:v="urn:schemas-microsoft-com:vml" xmlns:o="urn:schemas-microsoft-com:office:office" xmlns:dgm="http://schemas.openxmlformats.org/drawingml/2006/diagram" xmlns:c="http://schemas.openxmlformats.org/drawingml/2006/chart" xmlns:mv="urn:schemas-microsoft-com:mac:vml" xmlns="">
+    <mc:Fallback xmlns="" xmlns:mv="urn:schemas-microsoft-com:mac:vml" xmlns:c="http://schemas.openxmlformats.org/drawingml/2006/chart" xmlns:dgm="http://schemas.openxmlformats.org/drawingml/2006/diagram" xmlns:o="urn:schemas-microsoft-com:office:office" xmlns:v="urn:schemas-microsoft-com:vml" xmlns:pvml="urn:schemas-microsoft-com:office:powerpoint" xmlns:com="http://schemas.openxmlformats.org/drawingml/2006/compatibility" xmlns:p15="http://schemas.microsoft.com/office/powerpoint/2012/main" xmlns:ahyp="http://schemas.microsoft.com/office/drawing/2018/hyperlinkcolor">
       <p:transition spd="med">
         <p:fade/>
       </p:transition>
@@ -8784,165 +9013,179 @@
         </p:spPr>
         <p:txBody>
           <a:bodyPr>
-            <a:normAutofit fontScale="70000" lnSpcReduction="20000"/>
+            <a:normAutofit fontScale="92500" lnSpcReduction="20000"/>
           </a:bodyPr>
           <a:lstStyle/>
           <a:p>
             <a:r>
-              <a:rPr lang="fr-BE"/>
+              <a:rPr lang="fr-BE" sz="2800"/>
               <a:t>Pour répartir les éléments sur la rangée </a:t>
             </a:r>
           </a:p>
           <a:p>
             <a:r>
-              <a:rPr lang="fr-BE"/>
+              <a:rPr lang="fr-BE" sz="2800"/>
               <a:t>classes CSS prédéfinies</a:t>
             </a:r>
           </a:p>
           <a:p>
             <a:pPr lvl="1"/>
             <a:r>
-              <a:rPr lang="fr-BE" b="1">
-                <a:solidFill>
-                  <a:schemeClr val="accent6">
-                    <a:lumMod val="50000"/>
+              <a:rPr lang="fr-BE" sz="2400">
+                <a:solidFill>
+                  <a:srgbClr val="996633"/>
+                </a:solidFill>
+                <a:latin typeface="Consolas" panose="020B0609020204030204" pitchFamily="49" charset="0"/>
+                <a:cs typeface="Courier New" panose="02070309020205020404" pitchFamily="49" charset="0"/>
+              </a:rPr>
+              <a:t>.col-[</a:t>
+            </a:r>
+            <a:r>
+              <a:rPr lang="fr-BE" sz="2400">
+                <a:solidFill>
+                  <a:schemeClr val="accent2">
+                    <a:lumMod val="60000"/>
+                    <a:lumOff val="40000"/>
                   </a:schemeClr>
                 </a:solidFill>
-                <a:latin typeface="Courier New" panose="02070309020205020404" pitchFamily="49" charset="0"/>
+                <a:latin typeface="Consolas" panose="020B0609020204030204" pitchFamily="49" charset="0"/>
                 <a:cs typeface="Courier New" panose="02070309020205020404" pitchFamily="49" charset="0"/>
               </a:rPr>
-              <a:t>.col-[</a:t>
-            </a:r>
-            <a:r>
-              <a:rPr lang="fr-BE" b="1">
-                <a:solidFill>
-                  <a:schemeClr val="accent5"/>
-                </a:solidFill>
-                <a:latin typeface="Courier New" panose="02070309020205020404" pitchFamily="49" charset="0"/>
+              <a:t>screen size</a:t>
+            </a:r>
+            <a:r>
+              <a:rPr lang="fr-BE" sz="2400">
+                <a:solidFill>
+                  <a:srgbClr val="996633"/>
+                </a:solidFill>
+                <a:latin typeface="Consolas" panose="020B0609020204030204" pitchFamily="49" charset="0"/>
                 <a:cs typeface="Courier New" panose="02070309020205020404" pitchFamily="49" charset="0"/>
               </a:rPr>
-              <a:t>screen size</a:t>
-            </a:r>
-            <a:r>
-              <a:rPr lang="fr-BE" b="1">
-                <a:solidFill>
-                  <a:schemeClr val="accent6">
-                    <a:lumMod val="50000"/>
+              <a:t>]-[</a:t>
+            </a:r>
+            <a:r>
+              <a:rPr lang="fr-BE" sz="2400">
+                <a:solidFill>
+                  <a:schemeClr val="accent1">
+                    <a:lumMod val="75000"/>
                   </a:schemeClr>
                 </a:solidFill>
-                <a:latin typeface="Courier New" panose="02070309020205020404" pitchFamily="49" charset="0"/>
+                <a:latin typeface="Consolas" panose="020B0609020204030204" pitchFamily="49" charset="0"/>
                 <a:cs typeface="Courier New" panose="02070309020205020404" pitchFamily="49" charset="0"/>
               </a:rPr>
-              <a:t>]-[</a:t>
-            </a:r>
-            <a:r>
-              <a:rPr lang="fr-BE" b="1">
-                <a:solidFill>
-                  <a:schemeClr val="accent1"/>
-                </a:solidFill>
-                <a:latin typeface="Courier New" panose="02070309020205020404" pitchFamily="49" charset="0"/>
+              <a:t>nb cols</a:t>
+            </a:r>
+            <a:r>
+              <a:rPr lang="fr-BE" sz="2400">
+                <a:solidFill>
+                  <a:srgbClr val="996633"/>
+                </a:solidFill>
+                <a:latin typeface="Consolas" panose="020B0609020204030204" pitchFamily="49" charset="0"/>
                 <a:cs typeface="Courier New" panose="02070309020205020404" pitchFamily="49" charset="0"/>
               </a:rPr>
-              <a:t>nb cols</a:t>
-            </a:r>
-            <a:r>
-              <a:rPr lang="fr-BE" b="1">
-                <a:solidFill>
-                  <a:schemeClr val="accent6">
-                    <a:lumMod val="50000"/>
-                  </a:schemeClr>
-                </a:solidFill>
-                <a:latin typeface="Courier New" panose="02070309020205020404" pitchFamily="49" charset="0"/>
+              <a:t>]</a:t>
+            </a:r>
+          </a:p>
+          <a:p>
+            <a:pPr lvl="2"/>
+            <a:r>
+              <a:rPr lang="fr-BE" sz="2400"/>
+              <a:t>largeur de la colonne fonction de la taille de l'écran et du recouvrement de la grille</a:t>
+            </a:r>
+          </a:p>
+          <a:p>
+            <a:pPr lvl="1"/>
+            <a:r>
+              <a:rPr lang="fr-BE" sz="2400">
+                <a:solidFill>
+                  <a:srgbClr val="996633"/>
+                </a:solidFill>
+                <a:latin typeface="Consolas" panose="020B0609020204030204" pitchFamily="49" charset="0"/>
+              </a:rPr>
+              <a:t>.</a:t>
+            </a:r>
+            <a:r>
+              <a:rPr lang="fr-BE" sz="2400">
+                <a:solidFill>
+                  <a:srgbClr val="996633"/>
+                </a:solidFill>
+                <a:latin typeface="Consolas" panose="020B0609020204030204" pitchFamily="49" charset="0"/>
                 <a:cs typeface="Courier New" panose="02070309020205020404" pitchFamily="49" charset="0"/>
               </a:rPr>
-              <a:t>]</a:t>
+              <a:t>col</a:t>
             </a:r>
           </a:p>
           <a:p>
             <a:pPr lvl="2"/>
             <a:r>
-              <a:rPr lang="fr-BE"/>
-              <a:t>largeur de la colonne fonction de la taille de l'écran et du recouvrement de la grille</a:t>
+              <a:rPr lang="fr-BE" sz="2400"/>
+              <a:t>toutes les colonnes de la même largeur </a:t>
             </a:r>
           </a:p>
           <a:p>
             <a:pPr lvl="1"/>
             <a:r>
-              <a:rPr lang="fr-BE"/>
+              <a:rPr lang="fr-BE" sz="2400">
+                <a:solidFill>
+                  <a:srgbClr val="996633"/>
+                </a:solidFill>
+                <a:latin typeface="Consolas" panose="020B0609020204030204" pitchFamily="49" charset="0"/>
+                <a:cs typeface="Courier New" panose="02070309020205020404" pitchFamily="49" charset="0"/>
+              </a:rPr>
+              <a:t>.col-auto</a:t>
+            </a:r>
+          </a:p>
+          <a:p>
+            <a:pPr lvl="2"/>
+            <a:r>
+              <a:rPr lang="fr-BE"/>
+              <a:t>la largeur de chaque colonne s'adapte à son contenu </a:t>
+            </a:r>
+          </a:p>
+          <a:p>
+            <a:r>
+              <a:rPr lang="fr-BE" sz="2800"/>
+              <a:t>Seules les colonnes </a:t>
+            </a:r>
+            <a:r>
+              <a:rPr lang="fr-BE" sz="2800">
+                <a:solidFill>
+                  <a:srgbClr val="996633"/>
+                </a:solidFill>
+                <a:latin typeface="Consolas" panose="020B0609020204030204" pitchFamily="49" charset="0"/>
+              </a:rPr>
+              <a:t>.col</a:t>
+            </a:r>
+            <a:r>
+              <a:rPr lang="fr-BE" sz="2800"/>
+              <a:t> peuvent être des enfants immédiats de lignes </a:t>
+            </a:r>
+            <a:r>
+              <a:rPr lang="fr-BE" sz="2800">
+                <a:solidFill>
+                  <a:srgbClr val="996633"/>
+                </a:solidFill>
+                <a:latin typeface="Consolas" panose="020B0609020204030204" pitchFamily="49" charset="0"/>
+              </a:rPr>
+              <a:t>.row</a:t>
+            </a:r>
+            <a:r>
+              <a:rPr lang="fr-BE" sz="2800"/>
               <a:t>.</a:t>
             </a:r>
-            <a:r>
-              <a:rPr lang="fr-BE" sz="3100" b="1">
-                <a:solidFill>
-                  <a:schemeClr val="accent6">
-                    <a:lumMod val="50000"/>
-                  </a:schemeClr>
-                </a:solidFill>
-                <a:latin typeface="Courier New" panose="02070309020205020404" pitchFamily="49" charset="0"/>
-                <a:cs typeface="Courier New" panose="02070309020205020404" pitchFamily="49" charset="0"/>
-              </a:rPr>
-              <a:t>col</a:t>
-            </a:r>
-          </a:p>
-          <a:p>
-            <a:pPr lvl="2"/>
-            <a:r>
-              <a:rPr lang="fr-BE"/>
-              <a:t>toutes les colonnes de la même largeur </a:t>
+          </a:p>
+          <a:p>
+            <a:r>
+              <a:rPr lang="fr-BE" sz="2800"/>
+              <a:t>Le contenu doit être placé dans les colonnes.</a:t>
             </a:r>
           </a:p>
           <a:p>
             <a:pPr lvl="1"/>
-            <a:r>
-              <a:rPr lang="fr-BE" b="1">
-                <a:solidFill>
-                  <a:schemeClr val="accent6">
-                    <a:lumMod val="50000"/>
-                  </a:schemeClr>
-                </a:solidFill>
-                <a:latin typeface="Courier New" panose="02070309020205020404" pitchFamily="49" charset="0"/>
-                <a:cs typeface="Courier New" panose="02070309020205020404" pitchFamily="49" charset="0"/>
-              </a:rPr>
-              <a:t>.</a:t>
-            </a:r>
-            <a:r>
-              <a:rPr lang="fr-BE" sz="3100" b="1">
-                <a:solidFill>
-                  <a:schemeClr val="accent6">
-                    <a:lumMod val="50000"/>
-                  </a:schemeClr>
-                </a:solidFill>
-                <a:latin typeface="Courier New" panose="02070309020205020404" pitchFamily="49" charset="0"/>
-                <a:cs typeface="Courier New" panose="02070309020205020404" pitchFamily="49" charset="0"/>
-              </a:rPr>
-              <a:t>col-auto</a:t>
-            </a:r>
-          </a:p>
-          <a:p>
-            <a:pPr lvl="2"/>
-            <a:r>
-              <a:rPr lang="fr-BE"/>
-              <a:t>…</a:t>
-            </a:r>
-          </a:p>
-          <a:p>
-            <a:r>
-              <a:rPr lang="fr-BE"/>
-              <a:t>Seules les colonnes peuvent être des enfants immédiats de lignes.</a:t>
-            </a:r>
-          </a:p>
-          <a:p>
-            <a:r>
-              <a:rPr lang="fr-BE"/>
-              <a:t>Le contenu doit être placé dans les colonnes.</a:t>
-            </a:r>
-          </a:p>
-          <a:p>
-            <a:pPr lvl="1"/>
-            <a:endParaRPr lang="fr-BE"/>
-          </a:p>
-          <a:p>
-            <a:endParaRPr lang="fr-BE"/>
+            <a:endParaRPr lang="fr-BE" sz="2400"/>
+          </a:p>
+          <a:p>
+            <a:endParaRPr lang="fr-BE" sz="2800"/>
           </a:p>
         </p:txBody>
       </p:sp>
@@ -9696,128 +9939,156 @@
               <a:t>Nom de la classe :  </a:t>
             </a:r>
             <a:r>
-              <a:rPr lang="fr-BE" b="1">
-                <a:solidFill>
-                  <a:schemeClr val="accent6">
+              <a:rPr lang="fr-BE">
+                <a:solidFill>
+                  <a:srgbClr val="996633"/>
+                </a:solidFill>
+                <a:latin typeface="Consolas" panose="020B0609020204030204" pitchFamily="49" charset="0"/>
+                <a:cs typeface="Courier New" panose="02070309020205020404" pitchFamily="49" charset="0"/>
+              </a:rPr>
+              <a:t>.col-[</a:t>
+            </a:r>
+            <a:r>
+              <a:rPr lang="fr-BE">
+                <a:solidFill>
+                  <a:schemeClr val="accent5">
+                    <a:lumMod val="75000"/>
+                  </a:schemeClr>
+                </a:solidFill>
+                <a:latin typeface="Consolas" panose="020B0609020204030204" pitchFamily="49" charset="0"/>
+                <a:cs typeface="Courier New" panose="02070309020205020404" pitchFamily="49" charset="0"/>
+              </a:rPr>
+              <a:t>screen size</a:t>
+            </a:r>
+            <a:r>
+              <a:rPr lang="fr-BE">
+                <a:solidFill>
+                  <a:srgbClr val="996633"/>
+                </a:solidFill>
+                <a:latin typeface="Consolas" panose="020B0609020204030204" pitchFamily="49" charset="0"/>
+                <a:cs typeface="Courier New" panose="02070309020205020404" pitchFamily="49" charset="0"/>
+              </a:rPr>
+              <a:t>]-[</a:t>
+            </a:r>
+            <a:r>
+              <a:rPr lang="fr-BE">
+                <a:solidFill>
+                  <a:schemeClr val="accent1">
+                    <a:lumMod val="75000"/>
+                  </a:schemeClr>
+                </a:solidFill>
+                <a:latin typeface="Consolas" panose="020B0609020204030204" pitchFamily="49" charset="0"/>
+                <a:cs typeface="Courier New" panose="02070309020205020404" pitchFamily="49" charset="0"/>
+              </a:rPr>
+              <a:t>nb cols</a:t>
+            </a:r>
+            <a:r>
+              <a:rPr lang="fr-BE">
+                <a:solidFill>
+                  <a:srgbClr val="996633"/>
+                </a:solidFill>
+                <a:latin typeface="Consolas" panose="020B0609020204030204" pitchFamily="49" charset="0"/>
+                <a:cs typeface="Courier New" panose="02070309020205020404" pitchFamily="49" charset="0"/>
+              </a:rPr>
+              <a:t>]</a:t>
+            </a:r>
+          </a:p>
+          <a:p>
+            <a:r>
+              <a:rPr lang="fr-BE"/>
+              <a:t>Exemple : </a:t>
+            </a:r>
+            <a:r>
+              <a:rPr lang="fr-BE">
+                <a:solidFill>
+                  <a:srgbClr val="996633"/>
+                </a:solidFill>
+                <a:latin typeface="Consolas" panose="020B0609020204030204" pitchFamily="49" charset="0"/>
+                <a:cs typeface="Courier New" panose="02070309020205020404" pitchFamily="49" charset="0"/>
+              </a:rPr>
+              <a:t>.col-</a:t>
+            </a:r>
+            <a:r>
+              <a:rPr lang="fr-BE">
+                <a:solidFill>
+                  <a:schemeClr val="accent5">
+                    <a:lumMod val="75000"/>
+                  </a:schemeClr>
+                </a:solidFill>
+                <a:latin typeface="Consolas" panose="020B0609020204030204" pitchFamily="49" charset="0"/>
+                <a:cs typeface="Courier New" panose="02070309020205020404" pitchFamily="49" charset="0"/>
+              </a:rPr>
+              <a:t>md</a:t>
+            </a:r>
+            <a:r>
+              <a:rPr lang="fr-BE">
+                <a:solidFill>
+                  <a:srgbClr val="996633"/>
+                </a:solidFill>
+                <a:latin typeface="Consolas" panose="020B0609020204030204" pitchFamily="49" charset="0"/>
+                <a:cs typeface="Courier New" panose="02070309020205020404" pitchFamily="49" charset="0"/>
+              </a:rPr>
+              <a:t>-</a:t>
+            </a:r>
+            <a:r>
+              <a:rPr lang="fr-BE">
+                <a:solidFill>
+                  <a:schemeClr val="accent4">
                     <a:lumMod val="50000"/>
                   </a:schemeClr>
                 </a:solidFill>
-                <a:latin typeface="Courier New" panose="02070309020205020404" pitchFamily="49" charset="0"/>
+                <a:latin typeface="Consolas" panose="020B0609020204030204" pitchFamily="49" charset="0"/>
                 <a:cs typeface="Courier New" panose="02070309020205020404" pitchFamily="49" charset="0"/>
               </a:rPr>
-              <a:t>.col-[</a:t>
-            </a:r>
-            <a:r>
-              <a:rPr lang="fr-BE" b="1">
-                <a:solidFill>
-                  <a:schemeClr val="accent5"/>
-                </a:solidFill>
-                <a:latin typeface="Courier New" panose="02070309020205020404" pitchFamily="49" charset="0"/>
+              <a:t>4</a:t>
+            </a:r>
+          </a:p>
+          <a:p>
+            <a:pPr lvl="1"/>
+            <a:r>
+              <a:rPr lang="fr-BE">
+                <a:solidFill>
+                  <a:srgbClr val="996633"/>
+                </a:solidFill>
+                <a:latin typeface="Consolas" panose="020B0609020204030204" pitchFamily="49" charset="0"/>
                 <a:cs typeface="Courier New" panose="02070309020205020404" pitchFamily="49" charset="0"/>
               </a:rPr>
-              <a:t>screen size</a:t>
-            </a:r>
-            <a:r>
-              <a:rPr lang="fr-BE" b="1">
-                <a:solidFill>
-                  <a:schemeClr val="accent6">
-                    <a:lumMod val="50000"/>
+              <a:t>col</a:t>
+            </a:r>
+            <a:r>
+              <a:rPr lang="fr-BE"/>
+              <a:t> : colonne </a:t>
+            </a:r>
+          </a:p>
+          <a:p>
+            <a:pPr lvl="1"/>
+            <a:r>
+              <a:rPr lang="fr-BE">
+                <a:solidFill>
+                  <a:schemeClr val="accent5">
+                    <a:lumMod val="75000"/>
                   </a:schemeClr>
                 </a:solidFill>
-                <a:latin typeface="Courier New" panose="02070309020205020404" pitchFamily="49" charset="0"/>
+                <a:latin typeface="Consolas" panose="020B0609020204030204" pitchFamily="49" charset="0"/>
                 <a:cs typeface="Courier New" panose="02070309020205020404" pitchFamily="49" charset="0"/>
               </a:rPr>
-              <a:t>]-[</a:t>
-            </a:r>
-            <a:r>
-              <a:rPr lang="fr-BE" b="1">
-                <a:solidFill>
-                  <a:schemeClr val="accent1"/>
-                </a:solidFill>
-                <a:latin typeface="Courier New" panose="02070309020205020404" pitchFamily="49" charset="0"/>
-                <a:cs typeface="Courier New" panose="02070309020205020404" pitchFamily="49" charset="0"/>
-              </a:rPr>
-              <a:t>nb cols</a:t>
-            </a:r>
-            <a:r>
-              <a:rPr lang="fr-BE" b="1">
-                <a:solidFill>
-                  <a:schemeClr val="accent6">
-                    <a:lumMod val="50000"/>
+              <a:t>md</a:t>
+            </a:r>
+            <a:r>
+              <a:rPr lang="fr-BE"/>
+              <a:t> : taille de l'écran moyenne à grande, par ex. un laptop</a:t>
+            </a:r>
+          </a:p>
+          <a:p>
+            <a:pPr lvl="1"/>
+            <a:r>
+              <a:rPr lang="fr-BE">
+                <a:solidFill>
+                  <a:schemeClr val="accent1">
+                    <a:lumMod val="75000"/>
                   </a:schemeClr>
                 </a:solidFill>
-                <a:latin typeface="Courier New" panose="02070309020205020404" pitchFamily="49" charset="0"/>
-                <a:cs typeface="Courier New" panose="02070309020205020404" pitchFamily="49" charset="0"/>
-              </a:rPr>
-              <a:t>]</a:t>
-            </a:r>
-          </a:p>
-          <a:p>
-            <a:r>
-              <a:rPr lang="fr-BE"/>
-              <a:t>Exemple : </a:t>
-            </a:r>
-            <a:r>
-              <a:rPr lang="fr-BE" b="1">
-                <a:solidFill>
-                  <a:schemeClr val="accent6">
-                    <a:lumMod val="50000"/>
-                  </a:schemeClr>
-                </a:solidFill>
-                <a:latin typeface="Courier New" panose="02070309020205020404" pitchFamily="49" charset="0"/>
-                <a:cs typeface="Courier New" panose="02070309020205020404" pitchFamily="49" charset="0"/>
-              </a:rPr>
-              <a:t>.col-md-4</a:t>
-            </a:r>
-          </a:p>
-          <a:p>
-            <a:pPr lvl="1"/>
-            <a:r>
-              <a:rPr lang="fr-BE" b="1">
-                <a:solidFill>
-                  <a:schemeClr val="accent6">
-                    <a:lumMod val="50000"/>
-                  </a:schemeClr>
-                </a:solidFill>
-                <a:latin typeface="Courier New" panose="02070309020205020404" pitchFamily="49" charset="0"/>
-                <a:cs typeface="Courier New" panose="02070309020205020404" pitchFamily="49" charset="0"/>
-              </a:rPr>
-              <a:t>col</a:t>
-            </a:r>
-            <a:r>
-              <a:rPr lang="fr-BE"/>
-              <a:t> : colonne </a:t>
-            </a:r>
-          </a:p>
-          <a:p>
-            <a:pPr lvl="1"/>
-            <a:r>
-              <a:rPr lang="fr-BE" b="1">
-                <a:solidFill>
-                  <a:schemeClr val="accent6">
-                    <a:lumMod val="50000"/>
-                  </a:schemeClr>
-                </a:solidFill>
-                <a:latin typeface="Courier New" panose="02070309020205020404" pitchFamily="49" charset="0"/>
-                <a:cs typeface="Courier New" panose="02070309020205020404" pitchFamily="49" charset="0"/>
-              </a:rPr>
-              <a:t>md</a:t>
-            </a:r>
-            <a:r>
-              <a:rPr lang="fr-BE"/>
-              <a:t> : taille de l'écran moyenne à grande, par ex. un laptop</a:t>
-            </a:r>
-          </a:p>
-          <a:p>
-            <a:pPr lvl="1"/>
-            <a:r>
-              <a:rPr lang="fr-BE" b="1">
-                <a:solidFill>
-                  <a:schemeClr val="accent6">
-                    <a:lumMod val="50000"/>
-                  </a:schemeClr>
-                </a:solidFill>
-                <a:latin typeface="Courier New" panose="02070309020205020404" pitchFamily="49" charset="0"/>
+                <a:latin typeface="Consolas" panose="020B0609020204030204" pitchFamily="49" charset="0"/>
                 <a:cs typeface="Courier New" panose="02070309020205020404" pitchFamily="49" charset="0"/>
               </a:rPr>
               <a:t>4</a:t>
@@ -9844,66 +10115,96 @@
               <a:t>Exemple : </a:t>
             </a:r>
             <a:r>
-              <a:rPr lang="fr-BE" b="1">
-                <a:solidFill>
-                  <a:schemeClr val="accent6">
-                    <a:lumMod val="50000"/>
+              <a:rPr lang="fr-BE">
+                <a:solidFill>
+                  <a:srgbClr val="996633"/>
+                </a:solidFill>
+                <a:latin typeface="Consolas" panose="020B0609020204030204" pitchFamily="49" charset="0"/>
+                <a:cs typeface="Courier New" panose="02070309020205020404" pitchFamily="49" charset="0"/>
+              </a:rPr>
+              <a:t>.col-</a:t>
+            </a:r>
+            <a:r>
+              <a:rPr lang="fr-BE">
+                <a:solidFill>
+                  <a:schemeClr val="accent5">
+                    <a:lumMod val="75000"/>
                   </a:schemeClr>
                 </a:solidFill>
-                <a:latin typeface="Courier New" panose="02070309020205020404" pitchFamily="49" charset="0"/>
+                <a:latin typeface="Consolas" panose="020B0609020204030204" pitchFamily="49" charset="0"/>
                 <a:cs typeface="Courier New" panose="02070309020205020404" pitchFamily="49" charset="0"/>
               </a:rPr>
-              <a:t>.col-xs-12</a:t>
+              <a:t>xs</a:t>
+            </a:r>
+            <a:r>
+              <a:rPr lang="fr-BE">
+                <a:solidFill>
+                  <a:srgbClr val="996633"/>
+                </a:solidFill>
+                <a:latin typeface="Consolas" panose="020B0609020204030204" pitchFamily="49" charset="0"/>
+                <a:cs typeface="Courier New" panose="02070309020205020404" pitchFamily="49" charset="0"/>
+              </a:rPr>
+              <a:t>-</a:t>
+            </a:r>
+            <a:r>
+              <a:rPr lang="fr-BE">
+                <a:solidFill>
+                  <a:schemeClr val="accent1">
+                    <a:lumMod val="75000"/>
+                  </a:schemeClr>
+                </a:solidFill>
+                <a:latin typeface="Consolas" panose="020B0609020204030204" pitchFamily="49" charset="0"/>
+                <a:cs typeface="Courier New" panose="02070309020205020404" pitchFamily="49" charset="0"/>
+              </a:rPr>
+              <a:t>12</a:t>
             </a:r>
           </a:p>
           <a:p>
             <a:pPr lvl="1"/>
             <a:r>
-              <a:rPr lang="fr-BE" b="1">
-                <a:solidFill>
-                  <a:schemeClr val="accent6">
-                    <a:lumMod val="50000"/>
+              <a:rPr lang="fr-BE">
+                <a:solidFill>
+                  <a:srgbClr val="996633"/>
+                </a:solidFill>
+                <a:latin typeface="Consolas" panose="020B0609020204030204" pitchFamily="49" charset="0"/>
+                <a:cs typeface="Courier New" panose="02070309020205020404" pitchFamily="49" charset="0"/>
+              </a:rPr>
+              <a:t>col</a:t>
+            </a:r>
+            <a:r>
+              <a:rPr lang="fr-BE"/>
+              <a:t> : colonne </a:t>
+            </a:r>
+          </a:p>
+          <a:p>
+            <a:pPr lvl="1"/>
+            <a:r>
+              <a:rPr lang="fr-BE">
+                <a:solidFill>
+                  <a:schemeClr val="accent5">
+                    <a:lumMod val="75000"/>
                   </a:schemeClr>
                 </a:solidFill>
-                <a:latin typeface="Courier New" panose="02070309020205020404" pitchFamily="49" charset="0"/>
+                <a:latin typeface="Consolas" panose="020B0609020204030204" pitchFamily="49" charset="0"/>
                 <a:cs typeface="Courier New" panose="02070309020205020404" pitchFamily="49" charset="0"/>
               </a:rPr>
-              <a:t>col</a:t>
-            </a:r>
-            <a:r>
-              <a:rPr lang="fr-BE"/>
-              <a:t> : colonne </a:t>
+              <a:t>xs</a:t>
+            </a:r>
+            <a:r>
+              <a:rPr lang="fr-BE"/>
+              <a:t> : écran très petit , par ex. un smartphone</a:t>
             </a:r>
           </a:p>
           <a:p>
             <a:pPr lvl="1"/>
             <a:r>
-              <a:rPr lang="fr-BE" b="1">
-                <a:solidFill>
-                  <a:schemeClr val="accent6">
-                    <a:lumMod val="50000"/>
+              <a:rPr lang="fr-BE">
+                <a:solidFill>
+                  <a:schemeClr val="accent1">
+                    <a:lumMod val="75000"/>
                   </a:schemeClr>
                 </a:solidFill>
-                <a:latin typeface="Courier New" panose="02070309020205020404" pitchFamily="49" charset="0"/>
-                <a:cs typeface="Courier New" panose="02070309020205020404" pitchFamily="49" charset="0"/>
-              </a:rPr>
-              <a:t>xs</a:t>
-            </a:r>
-            <a:r>
-              <a:rPr lang="fr-BE"/>
-              <a:t> : écran très petit , par ex. un smartphone</a:t>
-            </a:r>
-          </a:p>
-          <a:p>
-            <a:pPr lvl="1"/>
-            <a:r>
-              <a:rPr lang="fr-BE" b="1">
-                <a:solidFill>
-                  <a:schemeClr val="accent6">
-                    <a:lumMod val="50000"/>
-                  </a:schemeClr>
-                </a:solidFill>
-                <a:latin typeface="Courier New" panose="02070309020205020404" pitchFamily="49" charset="0"/>
+                <a:latin typeface="Consolas" panose="020B0609020204030204" pitchFamily="49" charset="0"/>
                 <a:cs typeface="Courier New" panose="02070309020205020404" pitchFamily="49" charset="0"/>
               </a:rPr>
               <a:t>12</a:t>
@@ -10030,13 +10331,11 @@
               <a:buNone/>
             </a:pPr>
             <a:r>
-              <a:rPr lang="fr-BE" b="1">
-                <a:solidFill>
-                  <a:schemeClr val="accent6">
-                    <a:lumMod val="50000"/>
-                  </a:schemeClr>
-                </a:solidFill>
-                <a:latin typeface="Courier New" panose="02070309020205020404" pitchFamily="49" charset="0"/>
+              <a:rPr lang="fr-BE">
+                <a:solidFill>
+                  <a:srgbClr val="996633"/>
+                </a:solidFill>
+                <a:latin typeface="Consolas" panose="020B0609020204030204" pitchFamily="49" charset="0"/>
                 <a:cs typeface="Courier New" panose="02070309020205020404" pitchFamily="49" charset="0"/>
               </a:rPr>
               <a:t>&lt;div class="container"&gt;</a:t>
@@ -10047,13 +10346,11 @@
               <a:buNone/>
             </a:pPr>
             <a:r>
-              <a:rPr lang="fr-BE" b="1">
-                <a:solidFill>
-                  <a:schemeClr val="accent6">
-                    <a:lumMod val="50000"/>
-                  </a:schemeClr>
-                </a:solidFill>
-                <a:latin typeface="Courier New" panose="02070309020205020404" pitchFamily="49" charset="0"/>
+              <a:rPr lang="fr-BE">
+                <a:solidFill>
+                  <a:srgbClr val="996633"/>
+                </a:solidFill>
+                <a:latin typeface="Consolas" panose="020B0609020204030204" pitchFamily="49" charset="0"/>
                 <a:cs typeface="Courier New" panose="02070309020205020404" pitchFamily="49" charset="0"/>
               </a:rPr>
               <a:t>    &lt;div class="row"&gt;</a:t>
@@ -10064,13 +10361,11 @@
               <a:buNone/>
             </a:pPr>
             <a:r>
-              <a:rPr lang="fr-BE" b="1">
-                <a:solidFill>
-                  <a:schemeClr val="accent6">
-                    <a:lumMod val="50000"/>
-                  </a:schemeClr>
-                </a:solidFill>
-                <a:latin typeface="Courier New" panose="02070309020205020404" pitchFamily="49" charset="0"/>
+              <a:rPr lang="fr-BE">
+                <a:solidFill>
+                  <a:srgbClr val="996633"/>
+                </a:solidFill>
+                <a:latin typeface="Consolas" panose="020B0609020204030204" pitchFamily="49" charset="0"/>
                 <a:cs typeface="Courier New" panose="02070309020205020404" pitchFamily="49" charset="0"/>
               </a:rPr>
               <a:t>        &lt;div class="col-sm-6"&gt;Colonne 1&lt;/div&gt;</a:t>
@@ -10081,13 +10376,11 @@
               <a:buNone/>
             </a:pPr>
             <a:r>
-              <a:rPr lang="fr-BE" b="1">
-                <a:solidFill>
-                  <a:schemeClr val="accent6">
-                    <a:lumMod val="50000"/>
-                  </a:schemeClr>
-                </a:solidFill>
-                <a:latin typeface="Courier New" panose="02070309020205020404" pitchFamily="49" charset="0"/>
+              <a:rPr lang="fr-BE">
+                <a:solidFill>
+                  <a:srgbClr val="996633"/>
+                </a:solidFill>
+                <a:latin typeface="Consolas" panose="020B0609020204030204" pitchFamily="49" charset="0"/>
                 <a:cs typeface="Courier New" panose="02070309020205020404" pitchFamily="49" charset="0"/>
               </a:rPr>
               <a:t>        &lt;div class="col-sm-6"&gt;Colonne 2&lt;/div&gt;</a:t>
@@ -10098,13 +10391,11 @@
               <a:buNone/>
             </a:pPr>
             <a:r>
-              <a:rPr lang="fr-BE" b="1">
-                <a:solidFill>
-                  <a:schemeClr val="accent6">
-                    <a:lumMod val="50000"/>
-                  </a:schemeClr>
-                </a:solidFill>
-                <a:latin typeface="Courier New" panose="02070309020205020404" pitchFamily="49" charset="0"/>
+              <a:rPr lang="fr-BE">
+                <a:solidFill>
+                  <a:srgbClr val="996633"/>
+                </a:solidFill>
+                <a:latin typeface="Consolas" panose="020B0609020204030204" pitchFamily="49" charset="0"/>
                 <a:cs typeface="Courier New" panose="02070309020205020404" pitchFamily="49" charset="0"/>
               </a:rPr>
               <a:t>    &lt;/div&gt;</a:t>
@@ -10115,13 +10406,11 @@
               <a:buNone/>
             </a:pPr>
             <a:r>
-              <a:rPr lang="fr-BE" b="1">
-                <a:solidFill>
-                  <a:schemeClr val="accent6">
-                    <a:lumMod val="50000"/>
-                  </a:schemeClr>
-                </a:solidFill>
-                <a:latin typeface="Courier New" panose="02070309020205020404" pitchFamily="49" charset="0"/>
+              <a:rPr lang="fr-BE">
+                <a:solidFill>
+                  <a:srgbClr val="996633"/>
+                </a:solidFill>
+                <a:latin typeface="Consolas" panose="020B0609020204030204" pitchFamily="49" charset="0"/>
                 <a:cs typeface="Courier New" panose="02070309020205020404" pitchFamily="49" charset="0"/>
               </a:rPr>
               <a:t>&lt;/div&gt;</a:t>
@@ -10140,13 +10429,11 @@
               <a:t>Classe </a:t>
             </a:r>
             <a:r>
-              <a:rPr lang="fr-BE" b="1">
-                <a:solidFill>
-                  <a:schemeClr val="accent6">
-                    <a:lumMod val="50000"/>
-                  </a:schemeClr>
-                </a:solidFill>
-                <a:latin typeface="Courier New" panose="02070309020205020404" pitchFamily="49" charset="0"/>
+              <a:rPr lang="fr-BE">
+                <a:solidFill>
+                  <a:srgbClr val="996633"/>
+                </a:solidFill>
+                <a:latin typeface="Consolas" panose="020B0609020204030204" pitchFamily="49" charset="0"/>
                 <a:cs typeface="Courier New" panose="02070309020205020404" pitchFamily="49" charset="0"/>
               </a:rPr>
               <a:t>.container</a:t>
@@ -10166,13 +10453,11 @@
               <a:t>Classe </a:t>
             </a:r>
             <a:r>
-              <a:rPr lang="fr-BE" b="1">
-                <a:solidFill>
-                  <a:schemeClr val="accent6">
-                    <a:lumMod val="50000"/>
-                  </a:schemeClr>
-                </a:solidFill>
-                <a:latin typeface="Courier New" panose="02070309020205020404" pitchFamily="49" charset="0"/>
+              <a:rPr lang="fr-BE">
+                <a:solidFill>
+                  <a:srgbClr val="996633"/>
+                </a:solidFill>
+                <a:latin typeface="Consolas" panose="020B0609020204030204" pitchFamily="49" charset="0"/>
                 <a:cs typeface="Courier New" panose="02070309020205020404" pitchFamily="49" charset="0"/>
               </a:rPr>
               <a:t>.row</a:t>
@@ -10182,29 +10467,34 @@
               <a:t> enveloppant deux éléments </a:t>
             </a:r>
             <a:r>
-              <a:rPr lang="fr-BE" b="1">
-                <a:solidFill>
-                  <a:schemeClr val="accent6">
-                    <a:lumMod val="50000"/>
-                  </a:schemeClr>
-                </a:solidFill>
-                <a:latin typeface="Courier New" panose="02070309020205020404" pitchFamily="49" charset="0"/>
+              <a:rPr lang="fr-BE">
+                <a:solidFill>
+                  <a:srgbClr val="996633"/>
+                </a:solidFill>
+                <a:latin typeface="Consolas" panose="020B0609020204030204" pitchFamily="49" charset="0"/>
                 <a:cs typeface="Courier New" panose="02070309020205020404" pitchFamily="49" charset="0"/>
               </a:rPr>
               <a:t>&lt;div&gt;</a:t>
             </a:r>
             <a:r>
-              <a:rPr lang="fr-BE"/>
-              <a:t> de classe </a:t>
-            </a:r>
-            <a:r>
-              <a:rPr lang="fr-BE" b="1">
-                <a:solidFill>
-                  <a:schemeClr val="accent6">
-                    <a:lumMod val="50000"/>
-                  </a:schemeClr>
-                </a:solidFill>
-                <a:latin typeface="Courier New" panose="02070309020205020404" pitchFamily="49" charset="0"/>
+              <a:rPr lang="fr-BE">
+                <a:solidFill>
+                  <a:srgbClr val="996633"/>
+                </a:solidFill>
+                <a:latin typeface="Consolas" panose="020B0609020204030204" pitchFamily="49" charset="0"/>
+              </a:rPr>
+              <a:t> </a:t>
+            </a:r>
+            <a:r>
+              <a:rPr lang="fr-BE"/>
+              <a:t>de classe </a:t>
+            </a:r>
+            <a:r>
+              <a:rPr lang="fr-BE">
+                <a:solidFill>
+                  <a:srgbClr val="996633"/>
+                </a:solidFill>
+                <a:latin typeface="Consolas" panose="020B0609020204030204" pitchFamily="49" charset="0"/>
                 <a:cs typeface="Courier New" panose="02070309020205020404" pitchFamily="49" charset="0"/>
               </a:rPr>
               <a:t>.col-sm-6</a:t>
@@ -10305,24 +10595,191 @@
             <p:ph idx="1"/>
           </p:nvPr>
         </p:nvSpPr>
-        <p:spPr/>
+        <p:spPr>
+          <a:xfrm>
+            <a:off x="838200" y="1690688"/>
+            <a:ext cx="10515600" cy="5167311"/>
+          </a:xfrm>
+        </p:spPr>
         <p:txBody>
           <a:bodyPr>
-            <a:normAutofit fontScale="62500" lnSpcReduction="20000"/>
+            <a:normAutofit lnSpcReduction="10000"/>
           </a:bodyPr>
           <a:lstStyle/>
           <a:p>
-            <a:r>
-              <a:rPr lang="fr-BE"/>
+            <a:pPr>
+              <a:lnSpc>
+                <a:spcPct val="100000"/>
+              </a:lnSpc>
+            </a:pPr>
+            <a:r>
+              <a:rPr lang="fr-BE" sz="2000"/>
               <a:t>Grille avec quatre articles à présenter </a:t>
             </a:r>
           </a:p>
           <a:p>
             <a:pPr marL="457200" lvl="1" indent="0">
+              <a:lnSpc>
+                <a:spcPct val="100000"/>
+              </a:lnSpc>
               <a:buNone/>
             </a:pPr>
             <a:r>
-              <a:rPr lang="fr-BE" b="1">
+              <a:rPr lang="fr-BE" sz="2000">
+                <a:solidFill>
+                  <a:srgbClr val="996633"/>
+                </a:solidFill>
+                <a:latin typeface="Consolas" panose="020B0609020204030204" pitchFamily="49" charset="0"/>
+                <a:cs typeface="Courier New" panose="02070309020205020404" pitchFamily="49" charset="0"/>
+              </a:rPr>
+              <a:t>&lt;div class="container-fluid"&gt;</a:t>
+            </a:r>
+          </a:p>
+          <a:p>
+            <a:pPr marL="457200" lvl="1" indent="0">
+              <a:lnSpc>
+                <a:spcPct val="100000"/>
+              </a:lnSpc>
+              <a:buNone/>
+            </a:pPr>
+            <a:r>
+              <a:rPr lang="fr-BE" sz="2000">
+                <a:solidFill>
+                  <a:srgbClr val="996633"/>
+                </a:solidFill>
+                <a:latin typeface="Consolas" panose="020B0609020204030204" pitchFamily="49" charset="0"/>
+                <a:cs typeface="Courier New" panose="02070309020205020404" pitchFamily="49" charset="0"/>
+              </a:rPr>
+              <a:t>  &lt;div class="row"&gt;</a:t>
+            </a:r>
+          </a:p>
+          <a:p>
+            <a:pPr marL="457200" lvl="1" indent="0">
+              <a:lnSpc>
+                <a:spcPct val="100000"/>
+              </a:lnSpc>
+              <a:buNone/>
+            </a:pPr>
+            <a:r>
+              <a:rPr lang="fr-BE" sz="2000">
+                <a:solidFill>
+                  <a:srgbClr val="996633"/>
+                </a:solidFill>
+                <a:latin typeface="Consolas" panose="020B0609020204030204" pitchFamily="49" charset="0"/>
+                <a:cs typeface="Courier New" panose="02070309020205020404" pitchFamily="49" charset="0"/>
+              </a:rPr>
+              <a:t>    &lt;article </a:t>
+            </a:r>
+          </a:p>
+          <a:p>
+            <a:pPr marL="457200" lvl="1" indent="0">
+              <a:lnSpc>
+                <a:spcPct val="100000"/>
+              </a:lnSpc>
+              <a:buNone/>
+            </a:pPr>
+            <a:r>
+              <a:rPr lang="fr-BE" sz="2000">
+                <a:solidFill>
+                  <a:srgbClr val="996633"/>
+                </a:solidFill>
+                <a:latin typeface="Consolas" panose="020B0609020204030204" pitchFamily="49" charset="0"/>
+                <a:cs typeface="Courier New" panose="02070309020205020404" pitchFamily="49" charset="0"/>
+              </a:rPr>
+              <a:t>       class="col-xs-12 col-sm-6 col-md-4 col-lg-3"&gt;</a:t>
+            </a:r>
+          </a:p>
+          <a:p>
+            <a:pPr marL="457200" lvl="1" indent="0">
+              <a:lnSpc>
+                <a:spcPct val="100000"/>
+              </a:lnSpc>
+              <a:buNone/>
+            </a:pPr>
+            <a:r>
+              <a:rPr lang="fr-BE" sz="2000">
+                <a:solidFill>
+                  <a:srgbClr val="996633"/>
+                </a:solidFill>
+                <a:latin typeface="Consolas" panose="020B0609020204030204" pitchFamily="49" charset="0"/>
+                <a:cs typeface="Courier New" panose="02070309020205020404" pitchFamily="49" charset="0"/>
+              </a:rPr>
+              <a:t>         &lt;p&gt;Lorem ipsum dolor sit amet, … &lt;/p&gt;</a:t>
+            </a:r>
+          </a:p>
+          <a:p>
+            <a:pPr marL="457200" lvl="1" indent="0">
+              <a:lnSpc>
+                <a:spcPct val="100000"/>
+              </a:lnSpc>
+              <a:buNone/>
+            </a:pPr>
+            <a:r>
+              <a:rPr lang="fr-BE" sz="2000">
+                <a:solidFill>
+                  <a:srgbClr val="996633"/>
+                </a:solidFill>
+                <a:latin typeface="Consolas" panose="020B0609020204030204" pitchFamily="49" charset="0"/>
+                <a:cs typeface="Courier New" panose="02070309020205020404" pitchFamily="49" charset="0"/>
+              </a:rPr>
+              <a:t>    &lt;/article&gt; …</a:t>
+            </a:r>
+          </a:p>
+          <a:p>
+            <a:pPr>
+              <a:lnSpc>
+                <a:spcPct val="100000"/>
+              </a:lnSpc>
+            </a:pPr>
+            <a:r>
+              <a:rPr lang="fr-BE" sz="2000"/>
+              <a:t>Explication : </a:t>
+            </a:r>
+          </a:p>
+          <a:p>
+            <a:pPr lvl="1">
+              <a:lnSpc>
+                <a:spcPct val="100000"/>
+              </a:lnSpc>
+            </a:pPr>
+            <a:r>
+              <a:rPr lang="fr-BE" sz="2000"/>
+              <a:t>Classe </a:t>
+            </a:r>
+            <a:r>
+              <a:rPr lang="fr-BE" sz="2000">
+                <a:solidFill>
+                  <a:srgbClr val="996633"/>
+                </a:solidFill>
+                <a:latin typeface="Consolas" panose="020B0609020204030204" pitchFamily="49" charset="0"/>
+                <a:cs typeface="Courier New" panose="02070309020205020404" pitchFamily="49" charset="0"/>
+              </a:rPr>
+              <a:t>.container-fluid</a:t>
+            </a:r>
+          </a:p>
+          <a:p>
+            <a:pPr lvl="2">
+              <a:lnSpc>
+                <a:spcPct val="100000"/>
+              </a:lnSpc>
+            </a:pPr>
+            <a:r>
+              <a:rPr lang="fr-BE" sz="1800"/>
+              <a:t>layout prenant toute la largeur de l'écran</a:t>
+            </a:r>
+          </a:p>
+          <a:p>
+            <a:pPr lvl="1">
+              <a:lnSpc>
+                <a:spcPct val="100000"/>
+              </a:lnSpc>
+            </a:pPr>
+            <a:r>
+              <a:rPr lang="fr-BE" sz="2000"/>
+              <a:t>Classe </a:t>
+            </a:r>
+            <a:r>
+              <a:rPr lang="fr-BE" sz="2000" b="1">
                 <a:solidFill>
                   <a:schemeClr val="accent6">
                     <a:lumMod val="50000"/>
@@ -10331,15 +10788,24 @@
                 <a:latin typeface="Courier New" panose="02070309020205020404" pitchFamily="49" charset="0"/>
                 <a:cs typeface="Courier New" panose="02070309020205020404" pitchFamily="49" charset="0"/>
               </a:rPr>
-              <a:t>&lt;div class="container-fluid"&gt;</a:t>
-            </a:r>
-          </a:p>
-          <a:p>
-            <a:pPr marL="457200" lvl="1" indent="0">
-              <a:buNone/>
-            </a:pPr>
-            <a:r>
-              <a:rPr lang="fr-BE" b="1">
+              <a:t>.row </a:t>
+            </a:r>
+            <a:r>
+              <a:rPr lang="fr-BE" sz="2000"/>
+              <a:t>enveloppant une série d'éléments </a:t>
+            </a:r>
+            <a:r>
+              <a:rPr lang="fr-BE" sz="2000">
+                <a:solidFill>
+                  <a:srgbClr val="996633"/>
+                </a:solidFill>
+                <a:latin typeface="Consolas" panose="020B0609020204030204" pitchFamily="49" charset="0"/>
+                <a:cs typeface="Courier New" panose="02070309020205020404" pitchFamily="49" charset="0"/>
+              </a:rPr>
+              <a:t>&lt;article&gt;</a:t>
+            </a:r>
+            <a:r>
+              <a:rPr lang="fr-BE" sz="2000" b="1">
                 <a:solidFill>
                   <a:schemeClr val="accent6">
                     <a:lumMod val="50000"/>
@@ -10348,222 +10814,95 @@
                 <a:latin typeface="Courier New" panose="02070309020205020404" pitchFamily="49" charset="0"/>
                 <a:cs typeface="Courier New" panose="02070309020205020404" pitchFamily="49" charset="0"/>
               </a:rPr>
-              <a:t>  &lt;div class="row"&gt;</a:t>
-            </a:r>
-          </a:p>
-          <a:p>
-            <a:pPr marL="457200" lvl="1" indent="0">
-              <a:buNone/>
+              <a:t> </a:t>
+            </a:r>
+            <a:r>
+              <a:rPr lang="fr-BE" sz="2000"/>
+              <a:t>de classe </a:t>
+            </a:r>
+          </a:p>
+          <a:p>
+            <a:pPr lvl="2">
+              <a:lnSpc>
+                <a:spcPct val="100000"/>
+              </a:lnSpc>
             </a:pPr>
             <a:r>
-              <a:rPr lang="fr-BE" b="1">
-                <a:solidFill>
-                  <a:schemeClr val="accent6">
-                    <a:lumMod val="50000"/>
-                  </a:schemeClr>
-                </a:solidFill>
-                <a:latin typeface="Courier New" panose="02070309020205020404" pitchFamily="49" charset="0"/>
+              <a:rPr lang="fr-BE" sz="1800">
+                <a:solidFill>
+                  <a:srgbClr val="996633"/>
+                </a:solidFill>
+                <a:latin typeface="Consolas" panose="020B0609020204030204" pitchFamily="49" charset="0"/>
                 <a:cs typeface="Courier New" panose="02070309020205020404" pitchFamily="49" charset="0"/>
               </a:rPr>
-              <a:t>    &lt;article </a:t>
-            </a:r>
-          </a:p>
-          <a:p>
-            <a:pPr marL="457200" lvl="1" indent="0">
-              <a:buNone/>
+              <a:t>.col-xs-12</a:t>
+            </a:r>
+            <a:r>
+              <a:rPr lang="fr-BE" sz="1800"/>
+              <a:t> : chaque article prend toute la largeur de l'écran du smartphone </a:t>
+            </a:r>
+          </a:p>
+          <a:p>
+            <a:pPr lvl="2">
+              <a:lnSpc>
+                <a:spcPct val="100000"/>
+              </a:lnSpc>
             </a:pPr>
             <a:r>
-              <a:rPr lang="fr-BE" b="1">
-                <a:solidFill>
-                  <a:schemeClr val="accent6">
-                    <a:lumMod val="50000"/>
-                  </a:schemeClr>
-                </a:solidFill>
-                <a:latin typeface="Courier New" panose="02070309020205020404" pitchFamily="49" charset="0"/>
+              <a:rPr lang="fr-BE" sz="1800">
+                <a:solidFill>
+                  <a:srgbClr val="996633"/>
+                </a:solidFill>
+                <a:latin typeface="Consolas" panose="020B0609020204030204" pitchFamily="49" charset="0"/>
                 <a:cs typeface="Courier New" panose="02070309020205020404" pitchFamily="49" charset="0"/>
               </a:rPr>
-              <a:t>       class="col-xs-12 col-sm-6 col-md-4 col-lg-3"&gt;</a:t>
-            </a:r>
-          </a:p>
-          <a:p>
-            <a:pPr marL="457200" lvl="1" indent="0">
-              <a:buNone/>
+              <a:t>.col-sm-6</a:t>
+            </a:r>
+            <a:r>
+              <a:rPr lang="fr-BE" sz="1800"/>
+              <a:t> : chaque article prend la moitié de l'écran de la tablette </a:t>
+            </a:r>
+          </a:p>
+          <a:p>
+            <a:pPr lvl="2">
+              <a:lnSpc>
+                <a:spcPct val="100000"/>
+              </a:lnSpc>
             </a:pPr>
             <a:r>
-              <a:rPr lang="fr-BE" b="1">
-                <a:solidFill>
-                  <a:schemeClr val="accent6">
-                    <a:lumMod val="50000"/>
-                  </a:schemeClr>
-                </a:solidFill>
-                <a:latin typeface="Courier New" panose="02070309020205020404" pitchFamily="49" charset="0"/>
+              <a:rPr lang="fr-BE" sz="1800">
+                <a:solidFill>
+                  <a:srgbClr val="996633"/>
+                </a:solidFill>
+                <a:latin typeface="Consolas" panose="020B0609020204030204" pitchFamily="49" charset="0"/>
                 <a:cs typeface="Courier New" panose="02070309020205020404" pitchFamily="49" charset="0"/>
               </a:rPr>
-              <a:t>         &lt;p&gt;Lorem ipsum dolor sit amet, … &lt;/p&gt;</a:t>
-            </a:r>
-          </a:p>
-          <a:p>
-            <a:pPr marL="457200" lvl="1" indent="0">
-              <a:buNone/>
+              <a:t>.col-md-4</a:t>
+            </a:r>
+            <a:r>
+              <a:rPr lang="fr-BE" sz="1800"/>
+              <a:t> : chaque article prend un tiers de l'écran d'un laptop</a:t>
+            </a:r>
+          </a:p>
+          <a:p>
+            <a:pPr lvl="2">
+              <a:lnSpc>
+                <a:spcPct val="100000"/>
+              </a:lnSpc>
             </a:pPr>
             <a:r>
-              <a:rPr lang="fr-BE" b="1">
-                <a:solidFill>
-                  <a:schemeClr val="accent6">
-                    <a:lumMod val="50000"/>
-                  </a:schemeClr>
-                </a:solidFill>
-                <a:latin typeface="Courier New" panose="02070309020205020404" pitchFamily="49" charset="0"/>
+              <a:rPr lang="fr-BE" sz="1800">
+                <a:solidFill>
+                  <a:srgbClr val="996633"/>
+                </a:solidFill>
+                <a:latin typeface="Consolas" panose="020B0609020204030204" pitchFamily="49" charset="0"/>
                 <a:cs typeface="Courier New" panose="02070309020205020404" pitchFamily="49" charset="0"/>
               </a:rPr>
-              <a:t>    &lt;/article&gt; …</a:t>
-            </a:r>
-          </a:p>
-          <a:p>
-            <a:r>
-              <a:rPr lang="fr-BE"/>
-              <a:t>Explication : </a:t>
-            </a:r>
-          </a:p>
-          <a:p>
-            <a:pPr lvl="1"/>
-            <a:r>
-              <a:rPr lang="fr-BE"/>
-              <a:t>Classe </a:t>
-            </a:r>
-            <a:r>
-              <a:rPr lang="fr-BE" b="1">
-                <a:solidFill>
-                  <a:schemeClr val="accent6">
-                    <a:lumMod val="50000"/>
-                  </a:schemeClr>
-                </a:solidFill>
-                <a:latin typeface="Courier New" panose="02070309020205020404" pitchFamily="49" charset="0"/>
-                <a:cs typeface="Courier New" panose="02070309020205020404" pitchFamily="49" charset="0"/>
-              </a:rPr>
-              <a:t>.container-fluid</a:t>
-            </a:r>
-          </a:p>
-          <a:p>
-            <a:pPr lvl="2"/>
-            <a:r>
-              <a:rPr lang="fr-BE"/>
-              <a:t>layout prenant toute la largeur de l'écran</a:t>
-            </a:r>
-          </a:p>
-          <a:p>
-            <a:pPr lvl="1"/>
-            <a:r>
-              <a:rPr lang="fr-BE"/>
-              <a:t>Classe </a:t>
-            </a:r>
-            <a:r>
-              <a:rPr lang="fr-BE" b="1">
-                <a:solidFill>
-                  <a:schemeClr val="accent6">
-                    <a:lumMod val="50000"/>
-                  </a:schemeClr>
-                </a:solidFill>
-                <a:latin typeface="Courier New" panose="02070309020205020404" pitchFamily="49" charset="0"/>
-                <a:cs typeface="Courier New" panose="02070309020205020404" pitchFamily="49" charset="0"/>
-              </a:rPr>
-              <a:t>.row </a:t>
-            </a:r>
-            <a:r>
-              <a:rPr lang="fr-BE"/>
-              <a:t>enveloppant une série d'éléments </a:t>
-            </a:r>
-            <a:r>
-              <a:rPr lang="fr-BE" b="1">
-                <a:solidFill>
-                  <a:schemeClr val="accent6">
-                    <a:lumMod val="50000"/>
-                  </a:schemeClr>
-                </a:solidFill>
-                <a:latin typeface="Courier New" panose="02070309020205020404" pitchFamily="49" charset="0"/>
-                <a:cs typeface="Courier New" panose="02070309020205020404" pitchFamily="49" charset="0"/>
-              </a:rPr>
-              <a:t>&lt;article&gt; </a:t>
-            </a:r>
-            <a:r>
-              <a:rPr lang="fr-BE"/>
-              <a:t>de classe </a:t>
-            </a:r>
-          </a:p>
-          <a:p>
-            <a:pPr lvl="2"/>
-            <a:r>
-              <a:rPr lang="fr-BE" sz="2900" b="1">
-                <a:solidFill>
-                  <a:schemeClr val="accent6">
-                    <a:lumMod val="50000"/>
-                  </a:schemeClr>
-                </a:solidFill>
-                <a:latin typeface="Courier New" panose="02070309020205020404" pitchFamily="49" charset="0"/>
-                <a:cs typeface="Courier New" panose="02070309020205020404" pitchFamily="49" charset="0"/>
-              </a:rPr>
-              <a:t>.col-xs-12 </a:t>
-            </a:r>
-            <a:r>
-              <a:rPr lang="fr-BE"/>
-              <a:t>: chaque article prend toute la largeur de l'écran du smartphone </a:t>
-            </a:r>
-          </a:p>
-          <a:p>
-            <a:pPr lvl="2"/>
-            <a:r>
-              <a:rPr lang="fr-BE" sz="2900" b="1">
-                <a:solidFill>
-                  <a:schemeClr val="accent6">
-                    <a:lumMod val="50000"/>
-                  </a:schemeClr>
-                </a:solidFill>
-                <a:latin typeface="Courier New" panose="02070309020205020404" pitchFamily="49" charset="0"/>
-                <a:cs typeface="Courier New" panose="02070309020205020404" pitchFamily="49" charset="0"/>
-              </a:rPr>
-              <a:t>.col-sm-6 </a:t>
-            </a:r>
-            <a:r>
-              <a:rPr lang="fr-BE"/>
-              <a:t>: chaque article prend la moitié de l'écran de la tablette </a:t>
-            </a:r>
-          </a:p>
-          <a:p>
-            <a:pPr lvl="2"/>
-            <a:r>
-              <a:rPr lang="fr-BE" sz="2900" b="1">
-                <a:solidFill>
-                  <a:schemeClr val="accent6">
-                    <a:lumMod val="50000"/>
-                  </a:schemeClr>
-                </a:solidFill>
-                <a:latin typeface="Courier New" panose="02070309020205020404" pitchFamily="49" charset="0"/>
-                <a:cs typeface="Courier New" panose="02070309020205020404" pitchFamily="49" charset="0"/>
-              </a:rPr>
-              <a:t>.col-md-4 </a:t>
-            </a:r>
-            <a:r>
-              <a:rPr lang="fr-BE"/>
-              <a:t>: chaque article prend un tiers de l'écran d'un laptop</a:t>
-            </a:r>
-          </a:p>
-          <a:p>
-            <a:pPr lvl="2"/>
-            <a:r>
-              <a:rPr lang="fr-BE" sz="2900" b="1">
-                <a:solidFill>
-                  <a:schemeClr val="accent6">
-                    <a:lumMod val="50000"/>
-                  </a:schemeClr>
-                </a:solidFill>
-                <a:latin typeface="Courier New" panose="02070309020205020404" pitchFamily="49" charset="0"/>
-                <a:cs typeface="Courier New" panose="02070309020205020404" pitchFamily="49" charset="0"/>
-              </a:rPr>
-              <a:t>.col-lg-3 </a:t>
-            </a:r>
-            <a:r>
-              <a:rPr lang="fr-BE"/>
-              <a:t>: chaque article prend un quart de l'écran d'un desktop </a:t>
+              <a:t>.col-lg-3</a:t>
+            </a:r>
+            <a:r>
+              <a:rPr lang="fr-BE" sz="1800"/>
+              <a:t> : chaque article prend un quart de l'écran d'un desktop </a:t>
             </a:r>
           </a:p>
         </p:txBody>
@@ -10687,7 +11026,92 @@
           <a:p>
             <a:pPr lvl="1"/>
             <a:r>
-              <a:rPr lang="fr-BE" b="1">
+              <a:rPr lang="fr-BE">
+                <a:solidFill>
+                  <a:srgbClr val="996633"/>
+                </a:solidFill>
+                <a:latin typeface="Consolas" panose="020B0609020204030204" pitchFamily="49" charset="0"/>
+                <a:cs typeface="Courier New" panose="02070309020205020404" pitchFamily="49" charset="0"/>
+              </a:rPr>
+              <a:t>.align-items-start</a:t>
+            </a:r>
+          </a:p>
+          <a:p>
+            <a:pPr lvl="1"/>
+            <a:r>
+              <a:rPr lang="fr-BE">
+                <a:solidFill>
+                  <a:srgbClr val="996633"/>
+                </a:solidFill>
+                <a:latin typeface="Consolas" panose="020B0609020204030204" pitchFamily="49" charset="0"/>
+                <a:cs typeface="Courier New" panose="02070309020205020404" pitchFamily="49" charset="0"/>
+              </a:rPr>
+              <a:t>.align-items-center</a:t>
+            </a:r>
+          </a:p>
+          <a:p>
+            <a:pPr lvl="1"/>
+            <a:r>
+              <a:rPr lang="fr-BE">
+                <a:solidFill>
+                  <a:srgbClr val="996633"/>
+                </a:solidFill>
+                <a:latin typeface="Consolas" panose="020B0609020204030204" pitchFamily="49" charset="0"/>
+                <a:cs typeface="Courier New" panose="02070309020205020404" pitchFamily="49" charset="0"/>
+              </a:rPr>
+              <a:t>.align-items-end</a:t>
+            </a:r>
+          </a:p>
+          <a:p>
+            <a:r>
+              <a:rPr lang="fr-BE"/>
+              <a:t>alignement horizontal du texte</a:t>
+            </a:r>
+          </a:p>
+          <a:p>
+            <a:pPr lvl="1"/>
+            <a:r>
+              <a:rPr lang="fr-BE" sz="3100">
+                <a:solidFill>
+                  <a:srgbClr val="996633"/>
+                </a:solidFill>
+                <a:latin typeface="Consolas" panose="020B0609020204030204" pitchFamily="49" charset="0"/>
+                <a:cs typeface="Courier New" panose="02070309020205020404" pitchFamily="49" charset="0"/>
+              </a:rPr>
+              <a:t>.justify-content-start</a:t>
+            </a:r>
+          </a:p>
+          <a:p>
+            <a:pPr lvl="1"/>
+            <a:r>
+              <a:rPr lang="fr-BE" sz="3100">
+                <a:solidFill>
+                  <a:srgbClr val="996633"/>
+                </a:solidFill>
+                <a:latin typeface="Consolas" panose="020B0609020204030204" pitchFamily="49" charset="0"/>
+                <a:cs typeface="Courier New" panose="02070309020205020404" pitchFamily="49" charset="0"/>
+              </a:rPr>
+              <a:t>.justify-content-center</a:t>
+            </a:r>
+          </a:p>
+          <a:p>
+            <a:pPr lvl="1"/>
+            <a:r>
+              <a:rPr lang="fr-BE" sz="3100">
+                <a:solidFill>
+                  <a:srgbClr val="996633"/>
+                </a:solidFill>
+                <a:latin typeface="Consolas" panose="020B0609020204030204" pitchFamily="49" charset="0"/>
+                <a:cs typeface="Courier New" panose="02070309020205020404" pitchFamily="49" charset="0"/>
+              </a:rPr>
+              <a:t>.justify-content-end</a:t>
+            </a:r>
+            <a:r>
+              <a:rPr lang="fr-BE"/>
+              <a:t>, etc.</a:t>
+            </a:r>
+            <a:r>
+              <a:rPr lang="fr-BE" sz="3100" b="1">
                 <a:solidFill>
                   <a:schemeClr val="accent6">
                     <a:lumMod val="50000"/>
@@ -10696,137 +11120,36 @@
                 <a:latin typeface="Courier New" panose="02070309020205020404" pitchFamily="49" charset="0"/>
                 <a:cs typeface="Courier New" panose="02070309020205020404" pitchFamily="49" charset="0"/>
               </a:rPr>
-              <a:t>.align-items-start</a:t>
+              <a:t> </a:t>
+            </a:r>
+          </a:p>
+          <a:p>
+            <a:r>
+              <a:rPr lang="fr-BE"/>
+              <a:t>à surveiller</a:t>
             </a:r>
           </a:p>
           <a:p>
             <a:pPr lvl="1"/>
             <a:r>
-              <a:rPr lang="fr-BE" b="1">
-                <a:solidFill>
-                  <a:schemeClr val="accent6">
-                    <a:lumMod val="50000"/>
-                  </a:schemeClr>
-                </a:solidFill>
-                <a:latin typeface="Courier New" panose="02070309020205020404" pitchFamily="49" charset="0"/>
+              <a:rPr lang="fr-BE" sz="3100">
+                <a:solidFill>
+                  <a:srgbClr val="996633"/>
+                </a:solidFill>
+                <a:latin typeface="Consolas" panose="020B0609020204030204" pitchFamily="49" charset="0"/>
                 <a:cs typeface="Courier New" panose="02070309020205020404" pitchFamily="49" charset="0"/>
               </a:rPr>
-              <a:t>.align-items-center</a:t>
+              <a:t>.align-self</a:t>
             </a:r>
           </a:p>
           <a:p>
             <a:pPr lvl="1"/>
             <a:r>
-              <a:rPr lang="fr-BE" b="1">
-                <a:solidFill>
-                  <a:schemeClr val="accent6">
-                    <a:lumMod val="50000"/>
-                  </a:schemeClr>
-                </a:solidFill>
-                <a:latin typeface="Courier New" panose="02070309020205020404" pitchFamily="49" charset="0"/>
-                <a:cs typeface="Courier New" panose="02070309020205020404" pitchFamily="49" charset="0"/>
-              </a:rPr>
-              <a:t>.align-items-end</a:t>
-            </a:r>
-          </a:p>
-          <a:p>
-            <a:r>
-              <a:rPr lang="fr-BE"/>
-              <a:t>alignement horizontal du texte</a:t>
-            </a:r>
-          </a:p>
-          <a:p>
-            <a:pPr lvl="1"/>
-            <a:r>
-              <a:rPr lang="fr-BE" sz="3100" b="1">
-                <a:solidFill>
-                  <a:schemeClr val="accent6">
-                    <a:lumMod val="50000"/>
-                  </a:schemeClr>
-                </a:solidFill>
-                <a:latin typeface="Courier New" panose="02070309020205020404" pitchFamily="49" charset="0"/>
-                <a:cs typeface="Courier New" panose="02070309020205020404" pitchFamily="49" charset="0"/>
-              </a:rPr>
-              <a:t>.justify-content-start</a:t>
-            </a:r>
-          </a:p>
-          <a:p>
-            <a:pPr lvl="1"/>
-            <a:r>
-              <a:rPr lang="fr-BE" sz="3100" b="1">
-                <a:solidFill>
-                  <a:schemeClr val="accent6">
-                    <a:lumMod val="50000"/>
-                  </a:schemeClr>
-                </a:solidFill>
-                <a:latin typeface="Courier New" panose="02070309020205020404" pitchFamily="49" charset="0"/>
-                <a:cs typeface="Courier New" panose="02070309020205020404" pitchFamily="49" charset="0"/>
-              </a:rPr>
-              <a:t>.justify-content-center</a:t>
-            </a:r>
-          </a:p>
-          <a:p>
-            <a:pPr lvl="1"/>
-            <a:r>
-              <a:rPr lang="fr-BE" sz="3100" b="1">
-                <a:solidFill>
-                  <a:schemeClr val="accent6">
-                    <a:lumMod val="50000"/>
-                  </a:schemeClr>
-                </a:solidFill>
-                <a:latin typeface="Courier New" panose="02070309020205020404" pitchFamily="49" charset="0"/>
-                <a:cs typeface="Courier New" panose="02070309020205020404" pitchFamily="49" charset="0"/>
-              </a:rPr>
-              <a:t>.justify-content-end</a:t>
-            </a:r>
-            <a:r>
-              <a:rPr lang="fr-BE"/>
-              <a:t>, etc.</a:t>
-            </a:r>
-            <a:r>
-              <a:rPr lang="fr-BE" sz="3100" b="1">
-                <a:solidFill>
-                  <a:schemeClr val="accent6">
-                    <a:lumMod val="50000"/>
-                  </a:schemeClr>
-                </a:solidFill>
-                <a:latin typeface="Courier New" panose="02070309020205020404" pitchFamily="49" charset="0"/>
-                <a:cs typeface="Courier New" panose="02070309020205020404" pitchFamily="49" charset="0"/>
-              </a:rPr>
-              <a:t> </a:t>
-            </a:r>
-          </a:p>
-          <a:p>
-            <a:r>
-              <a:rPr lang="fr-BE"/>
-              <a:t>à surveiller</a:t>
-            </a:r>
-          </a:p>
-          <a:p>
-            <a:pPr lvl="1"/>
-            <a:r>
-              <a:rPr lang="fr-BE" sz="3100" b="1">
-                <a:solidFill>
-                  <a:schemeClr val="accent6">
-                    <a:lumMod val="50000"/>
-                  </a:schemeClr>
-                </a:solidFill>
-                <a:latin typeface="Courier New" panose="02070309020205020404" pitchFamily="49" charset="0"/>
-                <a:cs typeface="Courier New" panose="02070309020205020404" pitchFamily="49" charset="0"/>
-              </a:rPr>
-              <a:t>.align-self</a:t>
-            </a:r>
-          </a:p>
-          <a:p>
-            <a:pPr lvl="1"/>
-            <a:r>
-              <a:rPr lang="fr-BE" sz="3100" b="1">
-                <a:solidFill>
-                  <a:schemeClr val="accent6">
-                    <a:lumMod val="50000"/>
-                  </a:schemeClr>
-                </a:solidFill>
-                <a:latin typeface="Courier New" panose="02070309020205020404" pitchFamily="49" charset="0"/>
+              <a:rPr lang="fr-BE" sz="3100">
+                <a:solidFill>
+                  <a:srgbClr val="996633"/>
+                </a:solidFill>
+                <a:latin typeface="Consolas" panose="020B0609020204030204" pitchFamily="49" charset="0"/>
                 <a:cs typeface="Courier New" panose="02070309020205020404" pitchFamily="49" charset="0"/>
               </a:rPr>
               <a:t>.align-content</a:t>
@@ -10932,6 +11255,171 @@
 </file>
 
 <file path=ppt/slides/slide25.xml><?xml version="1.0" encoding="utf-8"?>
+<p:sld xmlns:a="http://schemas.openxmlformats.org/drawingml/2006/main" xmlns:r="http://schemas.openxmlformats.org/officeDocument/2006/relationships" xmlns:p="http://schemas.openxmlformats.org/presentationml/2006/main">
+  <p:cSld>
+    <p:spTree>
+      <p:nvGrpSpPr>
+        <p:cNvPr id="1" name=""/>
+        <p:cNvGrpSpPr/>
+        <p:nvPr/>
+      </p:nvGrpSpPr>
+      <p:grpSpPr>
+        <a:xfrm>
+          <a:off x="0" y="0"/>
+          <a:ext cx="0" cy="0"/>
+          <a:chOff x="0" y="0"/>
+          <a:chExt cx="0" cy="0"/>
+        </a:xfrm>
+      </p:grpSpPr>
+      <p:sp>
+        <p:nvSpPr>
+          <p:cNvPr id="2" name="Titre 1">
+            <a:extLst>
+              <a:ext uri="{FF2B5EF4-FFF2-40B4-BE49-F238E27FC236}">
+                <a16:creationId xmlns:a16="http://schemas.microsoft.com/office/drawing/2014/main" id="{A3A08C6C-0806-8FA9-8CD1-9053A1219C6F}"/>
+              </a:ext>
+            </a:extLst>
+          </p:cNvPr>
+          <p:cNvSpPr>
+            <a:spLocks noGrp="1"/>
+          </p:cNvSpPr>
+          <p:nvPr>
+            <p:ph type="title"/>
+          </p:nvPr>
+        </p:nvSpPr>
+        <p:spPr/>
+        <p:txBody>
+          <a:bodyPr/>
+          <a:lstStyle/>
+          <a:p>
+            <a:r>
+              <a:rPr lang="fr-BE"/>
+              <a:t>Layout complexe : exo 15</a:t>
+            </a:r>
+          </a:p>
+        </p:txBody>
+      </p:sp>
+      <p:sp>
+        <p:nvSpPr>
+          <p:cNvPr id="5" name="Espace réservé du contenu 4">
+            <a:extLst>
+              <a:ext uri="{FF2B5EF4-FFF2-40B4-BE49-F238E27FC236}">
+                <a16:creationId xmlns:a16="http://schemas.microsoft.com/office/drawing/2014/main" id="{4F1DE2F3-B11A-597C-0A88-AF59A2995C77}"/>
+              </a:ext>
+            </a:extLst>
+          </p:cNvPr>
+          <p:cNvSpPr>
+            <a:spLocks noGrp="1"/>
+          </p:cNvSpPr>
+          <p:nvPr>
+            <p:ph idx="1"/>
+          </p:nvPr>
+        </p:nvSpPr>
+        <p:spPr/>
+        <p:txBody>
+          <a:bodyPr/>
+          <a:lstStyle/>
+          <a:p>
+            <a:r>
+              <a:rPr lang="fr-BE"/>
+              <a:t> Remarquer l'encastrement de </a:t>
+            </a:r>
+            <a:r>
+              <a:rPr lang="fr-BE">
+                <a:solidFill>
+                  <a:srgbClr val="996633"/>
+                </a:solidFill>
+                <a:latin typeface="Consolas" panose="020B0609020204030204" pitchFamily="49" charset="0"/>
+              </a:rPr>
+              <a:t>.col</a:t>
+            </a:r>
+            <a:r>
+              <a:rPr lang="fr-BE"/>
+              <a:t> dans </a:t>
+            </a:r>
+            <a:r>
+              <a:rPr lang="fr-BE">
+                <a:solidFill>
+                  <a:srgbClr val="996633"/>
+                </a:solidFill>
+                <a:latin typeface="Consolas" panose="020B0609020204030204" pitchFamily="49" charset="0"/>
+              </a:rPr>
+              <a:t>.row </a:t>
+            </a:r>
+          </a:p>
+          <a:p>
+            <a:r>
+              <a:rPr lang="fr-BE"/>
+              <a:t> Mais aussi de </a:t>
+            </a:r>
+            <a:r>
+              <a:rPr lang="fr-BE">
+                <a:solidFill>
+                  <a:srgbClr val="996633"/>
+                </a:solidFill>
+                <a:latin typeface="Consolas" panose="020B0609020204030204" pitchFamily="49" charset="0"/>
+              </a:rPr>
+              <a:t>.row</a:t>
+            </a:r>
+            <a:r>
+              <a:rPr lang="fr-BE"/>
+              <a:t> dans </a:t>
+            </a:r>
+            <a:r>
+              <a:rPr lang="fr-BE">
+                <a:solidFill>
+                  <a:srgbClr val="996633"/>
+                </a:solidFill>
+                <a:latin typeface="Consolas" panose="020B0609020204030204" pitchFamily="49" charset="0"/>
+              </a:rPr>
+              <a:t>.col</a:t>
+            </a:r>
+            <a:r>
+              <a:rPr lang="fr-BE"/>
+              <a:t> !</a:t>
+            </a:r>
+          </a:p>
+          <a:p>
+            <a:r>
+              <a:rPr lang="fr-BE"/>
+              <a:t> A déguster à son aise </a:t>
+            </a:r>
+            <a:r>
+              <a:rPr lang="fr-BE">
+                <a:sym typeface="Wingdings" panose="05000000000000000000" pitchFamily="2" charset="2"/>
+              </a:rPr>
+              <a:t></a:t>
+            </a:r>
+            <a:endParaRPr lang="fr-BE"/>
+          </a:p>
+        </p:txBody>
+      </p:sp>
+    </p:spTree>
+    <p:extLst>
+      <p:ext uri="{BB962C8B-B14F-4D97-AF65-F5344CB8AC3E}">
+        <p14:creationId xmlns:p14="http://schemas.microsoft.com/office/powerpoint/2010/main" val="726596814"/>
+      </p:ext>
+    </p:extLst>
+  </p:cSld>
+  <p:clrMapOvr>
+    <a:masterClrMapping/>
+  </p:clrMapOvr>
+  <mc:AlternateContent xmlns:mc="http://schemas.openxmlformats.org/markup-compatibility/2006" xmlns:p14="http://schemas.microsoft.com/office/powerpoint/2010/main">
+    <mc:Choice Requires="p14">
+      <p:transition spd="slow">
+        <p14:reveal/>
+      </p:transition>
+    </mc:Choice>
+    <mc:Fallback xmlns="">
+      <p:transition spd="slow">
+        <p:fade/>
+      </p:transition>
+    </mc:Fallback>
+  </mc:AlternateContent>
+</p:sld>
+</file>
+
+<file path=ppt/slides/slide26.xml><?xml version="1.0" encoding="utf-8"?>
 <p:sld xmlns:a="http://schemas.openxmlformats.org/drawingml/2006/main" xmlns:r="http://schemas.openxmlformats.org/officeDocument/2006/relationships" xmlns:p="http://schemas.openxmlformats.org/presentationml/2006/main">
   <p:cSld>
     <p:spTree>
@@ -11383,7 +11871,7 @@
 </p:sld>
 </file>
 
-<file path=ppt/slides/slide26.xml><?xml version="1.0" encoding="utf-8"?>
+<file path=ppt/slides/slide27.xml><?xml version="1.0" encoding="utf-8"?>
 <p:sld xmlns:a="http://schemas.openxmlformats.org/drawingml/2006/main" xmlns:r="http://schemas.openxmlformats.org/officeDocument/2006/relationships" xmlns:p="http://schemas.openxmlformats.org/presentationml/2006/main">
   <p:cSld>
     <p:spTree>
@@ -11423,7 +11911,7 @@
           <a:p>
             <a:r>
               <a:rPr lang="fr-FR"/>
-              <a:t>Contenu</a:t>
+              <a:t>Bootstrap : Contenu</a:t>
             </a:r>
             <a:endParaRPr lang="fr-BE"/>
           </a:p>
@@ -11503,155 +11991,6 @@
     <p:extLst>
       <p:ext uri="{BB962C8B-B14F-4D97-AF65-F5344CB8AC3E}">
         <p14:creationId xmlns:p14="http://schemas.microsoft.com/office/powerpoint/2010/main" val="885153891"/>
-      </p:ext>
-    </p:extLst>
-  </p:cSld>
-  <p:clrMapOvr>
-    <a:masterClrMapping/>
-  </p:clrMapOvr>
-  <mc:AlternateContent xmlns:mc="http://schemas.openxmlformats.org/markup-compatibility/2006" xmlns:p14="http://schemas.microsoft.com/office/powerpoint/2010/main">
-    <mc:Choice Requires="p14">
-      <p:transition spd="slow">
-        <p14:reveal/>
-      </p:transition>
-    </mc:Choice>
-    <mc:Fallback xmlns="">
-      <p:transition spd="slow">
-        <p:fade/>
-      </p:transition>
-    </mc:Fallback>
-  </mc:AlternateContent>
-</p:sld>
-</file>
-
-<file path=ppt/slides/slide27.xml><?xml version="1.0" encoding="utf-8"?>
-<p:sld xmlns:a="http://schemas.openxmlformats.org/drawingml/2006/main" xmlns:r="http://schemas.openxmlformats.org/officeDocument/2006/relationships" xmlns:p="http://schemas.openxmlformats.org/presentationml/2006/main">
-  <p:cSld>
-    <p:spTree>
-      <p:nvGrpSpPr>
-        <p:cNvPr id="1" name=""/>
-        <p:cNvGrpSpPr/>
-        <p:nvPr/>
-      </p:nvGrpSpPr>
-      <p:grpSpPr>
-        <a:xfrm>
-          <a:off x="0" y="0"/>
-          <a:ext cx="0" cy="0"/>
-          <a:chOff x="0" y="0"/>
-          <a:chExt cx="0" cy="0"/>
-        </a:xfrm>
-      </p:grpSpPr>
-      <p:sp>
-        <p:nvSpPr>
-          <p:cNvPr id="2" name="Titre 1">
-            <a:extLst>
-              <a:ext uri="{FF2B5EF4-FFF2-40B4-BE49-F238E27FC236}">
-                <a16:creationId xmlns:a16="http://schemas.microsoft.com/office/drawing/2014/main" id="{2F34DC94-5DF4-364A-978D-00B173AB8A63}"/>
-              </a:ext>
-            </a:extLst>
-          </p:cNvPr>
-          <p:cNvSpPr>
-            <a:spLocks noGrp="1"/>
-          </p:cNvSpPr>
-          <p:nvPr>
-            <p:ph type="title"/>
-          </p:nvPr>
-        </p:nvSpPr>
-        <p:spPr/>
-        <p:txBody>
-          <a:bodyPr/>
-          <a:lstStyle/>
-          <a:p>
-            <a:r>
-              <a:rPr lang="fr-BE"/>
-              <a:t>Contenu </a:t>
-            </a:r>
-          </a:p>
-        </p:txBody>
-      </p:sp>
-      <p:sp>
-        <p:nvSpPr>
-          <p:cNvPr id="3" name="Espace réservé du contenu 2">
-            <a:extLst>
-              <a:ext uri="{FF2B5EF4-FFF2-40B4-BE49-F238E27FC236}">
-                <a16:creationId xmlns:a16="http://schemas.microsoft.com/office/drawing/2014/main" id="{B4A65B86-9F97-370D-F632-339B8B6D15FA}"/>
-              </a:ext>
-            </a:extLst>
-          </p:cNvPr>
-          <p:cNvSpPr>
-            <a:spLocks noGrp="1"/>
-          </p:cNvSpPr>
-          <p:nvPr>
-            <p:ph idx="1"/>
-          </p:nvPr>
-        </p:nvSpPr>
-        <p:spPr/>
-        <p:txBody>
-          <a:bodyPr>
-            <a:normAutofit lnSpcReduction="10000"/>
-          </a:bodyPr>
-          <a:lstStyle/>
-          <a:p>
-            <a:r>
-              <a:rPr lang="fr-BE"/>
-              <a:t>Les balises HTML élémentaires ont un nouveau style prédéfini.</a:t>
-            </a:r>
-          </a:p>
-          <a:p>
-            <a:pPr lvl="1"/>
-            <a:r>
-              <a:rPr lang="fr-BE"/>
-              <a:t>Heading</a:t>
-            </a:r>
-          </a:p>
-          <a:p>
-            <a:pPr lvl="1"/>
-            <a:r>
-              <a:rPr lang="fr-BE"/>
-              <a:t>Image</a:t>
-            </a:r>
-          </a:p>
-          <a:p>
-            <a:pPr lvl="1"/>
-            <a:r>
-              <a:rPr lang="fr-BE"/>
-              <a:t>Table</a:t>
-            </a:r>
-          </a:p>
-          <a:p>
-            <a:pPr lvl="1"/>
-            <a:r>
-              <a:rPr lang="fr-BE"/>
-              <a:t>Figure </a:t>
-            </a:r>
-          </a:p>
-          <a:p>
-            <a:pPr lvl="1"/>
-            <a:r>
-              <a:rPr lang="fr-BE"/>
-              <a:t>Forms</a:t>
-            </a:r>
-          </a:p>
-          <a:p>
-            <a:pPr lvl="1"/>
-            <a:r>
-              <a:rPr lang="fr-BE"/>
-              <a:t>Liste à puce</a:t>
-            </a:r>
-          </a:p>
-          <a:p>
-            <a:pPr lvl="1"/>
-            <a:r>
-              <a:rPr lang="fr-BE"/>
-              <a:t>Liste numérotée</a:t>
-            </a:r>
-          </a:p>
-        </p:txBody>
-      </p:sp>
-    </p:spTree>
-    <p:extLst>
-      <p:ext uri="{BB962C8B-B14F-4D97-AF65-F5344CB8AC3E}">
-        <p14:creationId xmlns:p14="http://schemas.microsoft.com/office/powerpoint/2010/main" val="2708424967"/>
       </p:ext>
     </p:extLst>
   </p:cSld>
@@ -11695,7 +12034,7 @@
           <p:cNvPr id="2" name="Titre 1">
             <a:extLst>
               <a:ext uri="{FF2B5EF4-FFF2-40B4-BE49-F238E27FC236}">
-                <a16:creationId xmlns:a16="http://schemas.microsoft.com/office/drawing/2014/main" id="{2C77C249-0300-8C93-31DC-F06D2B40CFE9}"/>
+                <a16:creationId xmlns:a16="http://schemas.microsoft.com/office/drawing/2014/main" id="{2F34DC94-5DF4-364A-978D-00B173AB8A63}"/>
               </a:ext>
             </a:extLst>
           </p:cNvPr>
@@ -11712,19 +12051,18 @@
           <a:lstStyle/>
           <a:p>
             <a:r>
-              <a:rPr lang="fr-FR"/>
-              <a:t>Composants</a:t>
-            </a:r>
-            <a:endParaRPr lang="fr-BE"/>
+              <a:rPr lang="fr-BE"/>
+              <a:t>Contenu </a:t>
+            </a:r>
           </a:p>
         </p:txBody>
       </p:sp>
       <p:sp>
         <p:nvSpPr>
-          <p:cNvPr id="4" name="Espace réservé du texte 3">
+          <p:cNvPr id="3" name="Espace réservé du contenu 2">
             <a:extLst>
               <a:ext uri="{FF2B5EF4-FFF2-40B4-BE49-F238E27FC236}">
-                <a16:creationId xmlns:a16="http://schemas.microsoft.com/office/drawing/2014/main" id="{F0F9C435-8846-9FC5-21B7-2C80B62F6A99}"/>
+                <a16:creationId xmlns:a16="http://schemas.microsoft.com/office/drawing/2014/main" id="{B4A65B86-9F97-370D-F632-339B8B6D15FA}"/>
               </a:ext>
             </a:extLst>
           </p:cNvPr>
@@ -11732,67 +12070,76 @@
             <a:spLocks noGrp="1"/>
           </p:cNvSpPr>
           <p:nvPr>
-            <p:ph type="body" idx="1"/>
+            <p:ph idx="1"/>
           </p:nvPr>
         </p:nvSpPr>
         <p:spPr/>
         <p:txBody>
-          <a:bodyPr/>
+          <a:bodyPr>
+            <a:normAutofit lnSpcReduction="10000"/>
+          </a:bodyPr>
           <a:lstStyle/>
           <a:p>
-            <a:endParaRPr lang="fr-BE"/>
+            <a:r>
+              <a:rPr lang="fr-BE"/>
+              <a:t>Les balises HTML élémentaires ont un nouveau style prédéfini.</a:t>
+            </a:r>
+          </a:p>
+          <a:p>
+            <a:pPr lvl="1"/>
+            <a:r>
+              <a:rPr lang="fr-BE"/>
+              <a:t>Heading</a:t>
+            </a:r>
+          </a:p>
+          <a:p>
+            <a:pPr lvl="1"/>
+            <a:r>
+              <a:rPr lang="fr-BE"/>
+              <a:t>Image</a:t>
+            </a:r>
+          </a:p>
+          <a:p>
+            <a:pPr lvl="1"/>
+            <a:r>
+              <a:rPr lang="fr-BE"/>
+              <a:t>Table</a:t>
+            </a:r>
+          </a:p>
+          <a:p>
+            <a:pPr lvl="1"/>
+            <a:r>
+              <a:rPr lang="fr-BE"/>
+              <a:t>Figure </a:t>
+            </a:r>
+          </a:p>
+          <a:p>
+            <a:pPr lvl="1"/>
+            <a:r>
+              <a:rPr lang="fr-BE"/>
+              <a:t>Forms</a:t>
+            </a:r>
+          </a:p>
+          <a:p>
+            <a:pPr lvl="1"/>
+            <a:r>
+              <a:rPr lang="fr-BE"/>
+              <a:t>Liste à puce</a:t>
+            </a:r>
+          </a:p>
+          <a:p>
+            <a:pPr lvl="1"/>
+            <a:r>
+              <a:rPr lang="fr-BE"/>
+              <a:t>Liste numérotée</a:t>
+            </a:r>
           </a:p>
         </p:txBody>
       </p:sp>
-      <p:pic>
-        <p:nvPicPr>
-          <p:cNvPr id="5122" name="Picture 2">
-            <a:extLst>
-              <a:ext uri="{FF2B5EF4-FFF2-40B4-BE49-F238E27FC236}">
-                <a16:creationId xmlns:a16="http://schemas.microsoft.com/office/drawing/2014/main" id="{71A9C937-C92D-8F11-C81D-BC9B053125A1}"/>
-              </a:ext>
-            </a:extLst>
-          </p:cNvPr>
-          <p:cNvPicPr>
-            <a:picLocks noGrp="1" noChangeAspect="1" noChangeArrowheads="1"/>
-          </p:cNvPicPr>
-          <p:nvPr>
-            <p:ph type="pic" sz="quarter" idx="10"/>
-          </p:nvPr>
-        </p:nvPicPr>
-        <p:blipFill>
-          <a:blip r:embed="rId2">
-            <a:extLst>
-              <a:ext uri="{28A0092B-C50C-407E-A947-70E740481C1C}">
-                <a14:useLocalDpi xmlns:a14="http://schemas.microsoft.com/office/drawing/2010/main" val="0"/>
-              </a:ext>
-            </a:extLst>
-          </a:blip>
-          <a:srcRect l="10096" r="10096"/>
-          <a:stretch>
-            <a:fillRect/>
-          </a:stretch>
-        </p:blipFill>
-        <p:spPr bwMode="auto">
-          <a:prstGeom prst="rect">
-            <a:avLst/>
-          </a:prstGeom>
-          <a:noFill/>
-          <a:extLst>
-            <a:ext uri="{909E8E84-426E-40DD-AFC4-6F175D3DCCD1}">
-              <a14:hiddenFill xmlns:a14="http://schemas.microsoft.com/office/drawing/2010/main">
-                <a:solidFill>
-                  <a:srgbClr val="FFFFFF"/>
-                </a:solidFill>
-              </a14:hiddenFill>
-            </a:ext>
-          </a:extLst>
-        </p:spPr>
-      </p:pic>
     </p:spTree>
     <p:extLst>
       <p:ext uri="{BB962C8B-B14F-4D97-AF65-F5344CB8AC3E}">
-        <p14:creationId xmlns:p14="http://schemas.microsoft.com/office/powerpoint/2010/main" val="2818270531"/>
+        <p14:creationId xmlns:p14="http://schemas.microsoft.com/office/powerpoint/2010/main" val="2708424967"/>
       </p:ext>
     </p:extLst>
   </p:cSld>
@@ -11836,7 +12183,7 @@
           <p:cNvPr id="2" name="Titre 1">
             <a:extLst>
               <a:ext uri="{FF2B5EF4-FFF2-40B4-BE49-F238E27FC236}">
-                <a16:creationId xmlns:a16="http://schemas.microsoft.com/office/drawing/2014/main" id="{7F7C8553-7F0B-F6DB-496C-E9DE2B857618}"/>
+                <a16:creationId xmlns:a16="http://schemas.microsoft.com/office/drawing/2014/main" id="{2C77C249-0300-8C93-31DC-F06D2B40CFE9}"/>
               </a:ext>
             </a:extLst>
           </p:cNvPr>
@@ -11853,18 +12200,19 @@
           <a:lstStyle/>
           <a:p>
             <a:r>
-              <a:rPr lang="fr-BE"/>
-              <a:t>Composants</a:t>
-            </a:r>
+              <a:rPr lang="fr-FR"/>
+              <a:t>Bootstrap : Composants</a:t>
+            </a:r>
+            <a:endParaRPr lang="fr-BE"/>
           </a:p>
         </p:txBody>
       </p:sp>
       <p:sp>
         <p:nvSpPr>
-          <p:cNvPr id="3" name="Espace réservé du contenu 2">
+          <p:cNvPr id="4" name="Espace réservé du texte 3">
             <a:extLst>
               <a:ext uri="{FF2B5EF4-FFF2-40B4-BE49-F238E27FC236}">
-                <a16:creationId xmlns:a16="http://schemas.microsoft.com/office/drawing/2014/main" id="{A1B77A25-D8A2-73AE-E966-F7033281E6DE}"/>
+                <a16:creationId xmlns:a16="http://schemas.microsoft.com/office/drawing/2014/main" id="{F0F9C435-8846-9FC5-21B7-2C80B62F6A99}"/>
               </a:ext>
             </a:extLst>
           </p:cNvPr>
@@ -11872,171 +12220,67 @@
             <a:spLocks noGrp="1"/>
           </p:cNvSpPr>
           <p:nvPr>
-            <p:ph idx="1"/>
+            <p:ph type="body" idx="1"/>
           </p:nvPr>
         </p:nvSpPr>
         <p:spPr/>
         <p:txBody>
-          <a:bodyPr numCol="3">
-            <a:normAutofit fontScale="92500" lnSpcReduction="20000"/>
-          </a:bodyPr>
+          <a:bodyPr/>
           <a:lstStyle/>
           <a:p>
-            <a:r>
-              <a:rPr lang="fr-BE"/>
-              <a:t>Accordion</a:t>
-            </a:r>
-          </a:p>
-          <a:p>
-            <a:r>
-              <a:rPr lang="fr-BE"/>
-              <a:t>Alerts</a:t>
-            </a:r>
-          </a:p>
-          <a:p>
-            <a:r>
-              <a:rPr lang="fr-BE"/>
-              <a:t>Badge</a:t>
-            </a:r>
-          </a:p>
-          <a:p>
-            <a:r>
-              <a:rPr lang="fr-BE"/>
-              <a:t>Breadcrumb</a:t>
-            </a:r>
-          </a:p>
-          <a:p>
-            <a:r>
-              <a:rPr lang="fr-BE"/>
-              <a:t>Button</a:t>
-            </a:r>
-          </a:p>
-          <a:p>
-            <a:r>
-              <a:rPr lang="fr-BE"/>
-              <a:t>Button group</a:t>
-            </a:r>
-          </a:p>
-          <a:p>
-            <a:r>
-              <a:rPr lang="fr-BE"/>
-              <a:t>Card</a:t>
-            </a:r>
-          </a:p>
-          <a:p>
-            <a:r>
-              <a:rPr lang="fr-BE"/>
-              <a:t>Carousel</a:t>
-            </a:r>
-          </a:p>
-          <a:p>
-            <a:r>
-              <a:rPr lang="fr-BE"/>
-              <a:t>Close button</a:t>
-            </a:r>
-          </a:p>
-          <a:p>
-            <a:r>
-              <a:rPr lang="fr-BE"/>
-              <a:t>Collapse</a:t>
-            </a:r>
-          </a:p>
-          <a:p>
-            <a:r>
-              <a:rPr lang="fr-BE"/>
-              <a:t>Dropdowns</a:t>
-            </a:r>
-          </a:p>
-          <a:p>
-            <a:r>
-              <a:rPr lang="fr-BE"/>
-              <a:t>List group</a:t>
-            </a:r>
-          </a:p>
-          <a:p>
-            <a:r>
-              <a:rPr lang="fr-BE"/>
-              <a:t>Jumbotron</a:t>
-            </a:r>
-          </a:p>
-          <a:p>
-            <a:r>
-              <a:rPr lang="fr-BE"/>
-              <a:t>Modal</a:t>
-            </a:r>
-          </a:p>
-          <a:p>
-            <a:r>
-              <a:rPr lang="fr-BE"/>
-              <a:t>Navbar</a:t>
-            </a:r>
-          </a:p>
-          <a:p>
-            <a:r>
-              <a:rPr lang="fr-BE"/>
-              <a:t>Navs &amp; tabs</a:t>
-            </a:r>
-          </a:p>
-          <a:p>
-            <a:r>
-              <a:rPr lang="fr-BE"/>
-              <a:t>Offcanvas</a:t>
-            </a:r>
-          </a:p>
-          <a:p>
-            <a:r>
-              <a:rPr lang="fr-BE"/>
-              <a:t>Pagination</a:t>
-            </a:r>
-          </a:p>
-          <a:p>
-            <a:r>
-              <a:rPr lang="fr-BE"/>
-              <a:t>Placeholders</a:t>
-            </a:r>
-          </a:p>
-          <a:p>
-            <a:r>
-              <a:rPr lang="fr-BE"/>
-              <a:t>Popovers</a:t>
-            </a:r>
-          </a:p>
-          <a:p>
-            <a:r>
-              <a:rPr lang="fr-BE"/>
-              <a:t>Progress</a:t>
-            </a:r>
-          </a:p>
-          <a:p>
-            <a:r>
-              <a:rPr lang="fr-BE"/>
-              <a:t>Scrollspy</a:t>
-            </a:r>
-          </a:p>
-          <a:p>
-            <a:r>
-              <a:rPr lang="fr-BE"/>
-              <a:t>Spinners</a:t>
-            </a:r>
-          </a:p>
-          <a:p>
-            <a:r>
-              <a:rPr lang="fr-BE"/>
-              <a:t>Toasts</a:t>
-            </a:r>
-          </a:p>
-          <a:p>
-            <a:r>
-              <a:rPr lang="fr-BE"/>
-              <a:t>Tooltips</a:t>
-            </a:r>
+            <a:endParaRPr lang="fr-BE"/>
           </a:p>
         </p:txBody>
       </p:sp>
+      <p:pic>
+        <p:nvPicPr>
+          <p:cNvPr id="5122" name="Picture 2">
+            <a:extLst>
+              <a:ext uri="{FF2B5EF4-FFF2-40B4-BE49-F238E27FC236}">
+                <a16:creationId xmlns:a16="http://schemas.microsoft.com/office/drawing/2014/main" id="{71A9C937-C92D-8F11-C81D-BC9B053125A1}"/>
+              </a:ext>
+            </a:extLst>
+          </p:cNvPr>
+          <p:cNvPicPr>
+            <a:picLocks noGrp="1" noChangeAspect="1" noChangeArrowheads="1"/>
+          </p:cNvPicPr>
+          <p:nvPr>
+            <p:ph type="pic" sz="quarter" idx="10"/>
+          </p:nvPr>
+        </p:nvPicPr>
+        <p:blipFill>
+          <a:blip r:embed="rId2">
+            <a:extLst>
+              <a:ext uri="{28A0092B-C50C-407E-A947-70E740481C1C}">
+                <a14:useLocalDpi xmlns:a14="http://schemas.microsoft.com/office/drawing/2010/main" val="0"/>
+              </a:ext>
+            </a:extLst>
+          </a:blip>
+          <a:srcRect l="10096" r="10096"/>
+          <a:stretch>
+            <a:fillRect/>
+          </a:stretch>
+        </p:blipFill>
+        <p:spPr bwMode="auto">
+          <a:prstGeom prst="rect">
+            <a:avLst/>
+          </a:prstGeom>
+          <a:noFill/>
+          <a:extLst>
+            <a:ext uri="{909E8E84-426E-40DD-AFC4-6F175D3DCCD1}">
+              <a14:hiddenFill xmlns:a14="http://schemas.microsoft.com/office/drawing/2010/main">
+                <a:solidFill>
+                  <a:srgbClr val="FFFFFF"/>
+                </a:solidFill>
+              </a14:hiddenFill>
+            </a:ext>
+          </a:extLst>
+        </p:spPr>
+      </p:pic>
     </p:spTree>
     <p:extLst>
       <p:ext uri="{BB962C8B-B14F-4D97-AF65-F5344CB8AC3E}">
-        <p14:creationId xmlns:p14="http://schemas.microsoft.com/office/powerpoint/2010/main" val="3094771178"/>
+        <p14:creationId xmlns:p14="http://schemas.microsoft.com/office/powerpoint/2010/main" val="2818270531"/>
       </p:ext>
     </p:extLst>
   </p:cSld>
@@ -12200,7 +12444,7 @@
         <p14:reveal/>
       </p:transition>
     </mc:Choice>
-    <mc:Fallback xmlns="" xmlns:mv="urn:schemas-microsoft-com:mac:vml" xmlns:c="http://schemas.openxmlformats.org/drawingml/2006/chart" xmlns:dgm="http://schemas.openxmlformats.org/drawingml/2006/diagram" xmlns:o="urn:schemas-microsoft-com:office:office" xmlns:v="urn:schemas-microsoft-com:vml" xmlns:pvml="urn:schemas-microsoft-com:office:powerpoint" xmlns:com="http://schemas.openxmlformats.org/drawingml/2006/compatibility" xmlns:p15="http://schemas.microsoft.com/office/powerpoint/2012/main" xmlns:ahyp="http://schemas.microsoft.com/office/drawing/2018/hyperlinkcolor">
+    <mc:Fallback xmlns:ahyp="http://schemas.microsoft.com/office/drawing/2018/hyperlinkcolor" xmlns:p15="http://schemas.microsoft.com/office/powerpoint/2012/main" xmlns:com="http://schemas.openxmlformats.org/drawingml/2006/compatibility" xmlns:pvml="urn:schemas-microsoft-com:office:powerpoint" xmlns:v="urn:schemas-microsoft-com:vml" xmlns:o="urn:schemas-microsoft-com:office:office" xmlns:dgm="http://schemas.openxmlformats.org/drawingml/2006/diagram" xmlns:c="http://schemas.openxmlformats.org/drawingml/2006/chart" xmlns:mv="urn:schemas-microsoft-com:mac:vml" xmlns="">
       <p:transition spd="med">
         <p:fade/>
       </p:transition>
@@ -12210,6 +12454,250 @@
 </file>
 
 <file path=ppt/slides/slide30.xml><?xml version="1.0" encoding="utf-8"?>
+<p:sld xmlns:a="http://schemas.openxmlformats.org/drawingml/2006/main" xmlns:r="http://schemas.openxmlformats.org/officeDocument/2006/relationships" xmlns:p="http://schemas.openxmlformats.org/presentationml/2006/main">
+  <p:cSld>
+    <p:spTree>
+      <p:nvGrpSpPr>
+        <p:cNvPr id="1" name=""/>
+        <p:cNvGrpSpPr/>
+        <p:nvPr/>
+      </p:nvGrpSpPr>
+      <p:grpSpPr>
+        <a:xfrm>
+          <a:off x="0" y="0"/>
+          <a:ext cx="0" cy="0"/>
+          <a:chOff x="0" y="0"/>
+          <a:chExt cx="0" cy="0"/>
+        </a:xfrm>
+      </p:grpSpPr>
+      <p:sp>
+        <p:nvSpPr>
+          <p:cNvPr id="2" name="Titre 1">
+            <a:extLst>
+              <a:ext uri="{FF2B5EF4-FFF2-40B4-BE49-F238E27FC236}">
+                <a16:creationId xmlns:a16="http://schemas.microsoft.com/office/drawing/2014/main" id="{7F7C8553-7F0B-F6DB-496C-E9DE2B857618}"/>
+              </a:ext>
+            </a:extLst>
+          </p:cNvPr>
+          <p:cNvSpPr>
+            <a:spLocks noGrp="1"/>
+          </p:cNvSpPr>
+          <p:nvPr>
+            <p:ph type="title"/>
+          </p:nvPr>
+        </p:nvSpPr>
+        <p:spPr/>
+        <p:txBody>
+          <a:bodyPr/>
+          <a:lstStyle/>
+          <a:p>
+            <a:r>
+              <a:rPr lang="fr-BE"/>
+              <a:t>Composants</a:t>
+            </a:r>
+          </a:p>
+        </p:txBody>
+      </p:sp>
+      <p:sp>
+        <p:nvSpPr>
+          <p:cNvPr id="3" name="Espace réservé du contenu 2">
+            <a:extLst>
+              <a:ext uri="{FF2B5EF4-FFF2-40B4-BE49-F238E27FC236}">
+                <a16:creationId xmlns:a16="http://schemas.microsoft.com/office/drawing/2014/main" id="{A1B77A25-D8A2-73AE-E966-F7033281E6DE}"/>
+              </a:ext>
+            </a:extLst>
+          </p:cNvPr>
+          <p:cNvSpPr>
+            <a:spLocks noGrp="1"/>
+          </p:cNvSpPr>
+          <p:nvPr>
+            <p:ph idx="1"/>
+          </p:nvPr>
+        </p:nvSpPr>
+        <p:spPr/>
+        <p:txBody>
+          <a:bodyPr numCol="3">
+            <a:normAutofit fontScale="92500" lnSpcReduction="20000"/>
+          </a:bodyPr>
+          <a:lstStyle/>
+          <a:p>
+            <a:r>
+              <a:rPr lang="fr-BE"/>
+              <a:t>Accordion</a:t>
+            </a:r>
+          </a:p>
+          <a:p>
+            <a:r>
+              <a:rPr lang="fr-BE"/>
+              <a:t>Alerts</a:t>
+            </a:r>
+          </a:p>
+          <a:p>
+            <a:r>
+              <a:rPr lang="fr-BE"/>
+              <a:t>Badge</a:t>
+            </a:r>
+          </a:p>
+          <a:p>
+            <a:r>
+              <a:rPr lang="fr-BE"/>
+              <a:t>Breadcrumb</a:t>
+            </a:r>
+          </a:p>
+          <a:p>
+            <a:r>
+              <a:rPr lang="fr-BE"/>
+              <a:t>Button</a:t>
+            </a:r>
+          </a:p>
+          <a:p>
+            <a:r>
+              <a:rPr lang="fr-BE"/>
+              <a:t>Button group</a:t>
+            </a:r>
+          </a:p>
+          <a:p>
+            <a:r>
+              <a:rPr lang="fr-BE"/>
+              <a:t>Card</a:t>
+            </a:r>
+          </a:p>
+          <a:p>
+            <a:r>
+              <a:rPr lang="fr-BE"/>
+              <a:t>Carousel</a:t>
+            </a:r>
+          </a:p>
+          <a:p>
+            <a:r>
+              <a:rPr lang="fr-BE"/>
+              <a:t>Close button</a:t>
+            </a:r>
+          </a:p>
+          <a:p>
+            <a:r>
+              <a:rPr lang="fr-BE"/>
+              <a:t>Collapse</a:t>
+            </a:r>
+          </a:p>
+          <a:p>
+            <a:r>
+              <a:rPr lang="fr-BE"/>
+              <a:t>Dropdowns</a:t>
+            </a:r>
+          </a:p>
+          <a:p>
+            <a:r>
+              <a:rPr lang="fr-BE"/>
+              <a:t>List group</a:t>
+            </a:r>
+          </a:p>
+          <a:p>
+            <a:r>
+              <a:rPr lang="fr-BE"/>
+              <a:t>Jumbotron</a:t>
+            </a:r>
+          </a:p>
+          <a:p>
+            <a:r>
+              <a:rPr lang="fr-BE"/>
+              <a:t>Modal</a:t>
+            </a:r>
+          </a:p>
+          <a:p>
+            <a:r>
+              <a:rPr lang="fr-BE"/>
+              <a:t>Navbar</a:t>
+            </a:r>
+          </a:p>
+          <a:p>
+            <a:r>
+              <a:rPr lang="fr-BE"/>
+              <a:t>Navs &amp; tabs</a:t>
+            </a:r>
+          </a:p>
+          <a:p>
+            <a:r>
+              <a:rPr lang="fr-BE"/>
+              <a:t>Offcanvas</a:t>
+            </a:r>
+          </a:p>
+          <a:p>
+            <a:r>
+              <a:rPr lang="fr-BE"/>
+              <a:t>Pagination</a:t>
+            </a:r>
+          </a:p>
+          <a:p>
+            <a:r>
+              <a:rPr lang="fr-BE"/>
+              <a:t>Placeholders</a:t>
+            </a:r>
+          </a:p>
+          <a:p>
+            <a:r>
+              <a:rPr lang="fr-BE"/>
+              <a:t>Popovers</a:t>
+            </a:r>
+          </a:p>
+          <a:p>
+            <a:r>
+              <a:rPr lang="fr-BE"/>
+              <a:t>Progress</a:t>
+            </a:r>
+          </a:p>
+          <a:p>
+            <a:r>
+              <a:rPr lang="fr-BE"/>
+              <a:t>Scrollspy</a:t>
+            </a:r>
+          </a:p>
+          <a:p>
+            <a:r>
+              <a:rPr lang="fr-BE"/>
+              <a:t>Spinners</a:t>
+            </a:r>
+          </a:p>
+          <a:p>
+            <a:r>
+              <a:rPr lang="fr-BE"/>
+              <a:t>Toasts</a:t>
+            </a:r>
+          </a:p>
+          <a:p>
+            <a:r>
+              <a:rPr lang="fr-BE"/>
+              <a:t>Tooltips</a:t>
+            </a:r>
+          </a:p>
+        </p:txBody>
+      </p:sp>
+    </p:spTree>
+    <p:extLst>
+      <p:ext uri="{BB962C8B-B14F-4D97-AF65-F5344CB8AC3E}">
+        <p14:creationId xmlns:p14="http://schemas.microsoft.com/office/powerpoint/2010/main" val="3094771178"/>
+      </p:ext>
+    </p:extLst>
+  </p:cSld>
+  <p:clrMapOvr>
+    <a:masterClrMapping/>
+  </p:clrMapOvr>
+  <mc:AlternateContent xmlns:mc="http://schemas.openxmlformats.org/markup-compatibility/2006" xmlns:p14="http://schemas.microsoft.com/office/powerpoint/2010/main">
+    <mc:Choice Requires="p14">
+      <p:transition spd="slow">
+        <p14:reveal/>
+      </p:transition>
+    </mc:Choice>
+    <mc:Fallback xmlns="">
+      <p:transition spd="slow">
+        <p:fade/>
+      </p:transition>
+    </mc:Fallback>
+  </mc:AlternateContent>
+</p:sld>
+</file>
+
+<file path=ppt/slides/slide31.xml><?xml version="1.0" encoding="utf-8"?>
 <p:sld xmlns:a="http://schemas.openxmlformats.org/drawingml/2006/main" xmlns:r="http://schemas.openxmlformats.org/officeDocument/2006/relationships" xmlns:p="http://schemas.openxmlformats.org/presentationml/2006/main">
   <p:cSld>
     <p:spTree>
@@ -13490,7 +13978,7 @@
           <a:p>
             <a:r>
               <a:rPr lang="fr-FR"/>
-              <a:t>Installation et configuration</a:t>
+              <a:t>Bootstrap : introduction</a:t>
             </a:r>
             <a:endParaRPr lang="fr-BE"/>
           </a:p>
@@ -13514,10 +14002,33 @@
         </p:nvSpPr>
         <p:spPr/>
         <p:txBody>
-          <a:bodyPr/>
+          <a:bodyPr numCol="3">
+            <a:normAutofit/>
+          </a:bodyPr>
           <a:lstStyle/>
           <a:p>
-            <a:endParaRPr lang="fr-BE"/>
+            <a:r>
+              <a:rPr lang="fr-BE"/>
+              <a:t>description </a:t>
+            </a:r>
+          </a:p>
+          <a:p>
+            <a:r>
+              <a:rPr lang="fr-BE"/>
+              <a:t>marché</a:t>
+            </a:r>
+          </a:p>
+          <a:p>
+            <a:r>
+              <a:rPr lang="fr-BE"/>
+              <a:t>installation</a:t>
+            </a:r>
+          </a:p>
+          <a:p>
+            <a:r>
+              <a:rPr lang="fr-BE"/>
+              <a:t>configuration</a:t>
+            </a:r>
           </a:p>
         </p:txBody>
       </p:sp>
@@ -13673,8 +14184,24 @@
           <a:p>
             <a:pPr lvl="1"/>
             <a:r>
-              <a:rPr lang="fr-BE"/>
-              <a:t>responsives</a:t>
+              <a:rPr lang="fr-BE">
+                <a:solidFill>
+                  <a:schemeClr val="accent2"/>
+                </a:solidFill>
+              </a:rPr>
+              <a:t>adaptables</a:t>
+            </a:r>
+            <a:r>
+              <a:rPr lang="fr-BE"/>
+              <a:t> (</a:t>
+            </a:r>
+            <a:r>
+              <a:rPr lang="fr-BE" i="1"/>
+              <a:t>responsive</a:t>
+            </a:r>
+            <a:r>
+              <a:rPr lang="fr-BE"/>
+              <a:t>)</a:t>
             </a:r>
           </a:p>
           <a:p>
@@ -13707,7 +14234,11 @@
           <a:p>
             <a:pPr lvl="1"/>
             <a:r>
-              <a:rPr lang="fr-BE"/>
+              <a:rPr lang="fr-BE">
+                <a:solidFill>
+                  <a:schemeClr val="accent2"/>
+                </a:solidFill>
+              </a:rPr>
               <a:t>Grille de 12 colonnes </a:t>
             </a:r>
           </a:p>
@@ -13835,13 +14366,13 @@
         <p:spPr/>
         <p:txBody>
           <a:bodyPr>
-            <a:normAutofit fontScale="77500" lnSpcReduction="20000"/>
+            <a:normAutofit fontScale="92500" lnSpcReduction="20000"/>
           </a:bodyPr>
           <a:lstStyle/>
           <a:p>
             <a:r>
               <a:rPr lang="fr-BE"/>
-              <a:t>Mars 2023 : version 5.2</a:t>
+              <a:t>2026 : version 5.3.X</a:t>
             </a:r>
           </a:p>
           <a:p>
@@ -13906,90 +14437,78 @@
         <p:spPr/>
         <p:txBody>
           <a:bodyPr>
-            <a:normAutofit fontScale="77500" lnSpcReduction="20000"/>
+            <a:normAutofit fontScale="92500" lnSpcReduction="20000"/>
           </a:bodyPr>
           <a:lstStyle/>
           <a:p>
             <a:r>
               <a:rPr lang="fr-BE"/>
-              <a:t>Compétiteurs</a:t>
+              <a:t>Compétiteurs </a:t>
             </a:r>
           </a:p>
           <a:p>
             <a:pPr lvl="1"/>
             <a:r>
-              <a:rPr lang="fr-BE"/>
-              <a:t>Foundation  (foundation.zurb.com)</a:t>
+              <a:rPr lang="fr-BE">
+                <a:solidFill>
+                  <a:schemeClr val="accent2"/>
+                </a:solidFill>
+              </a:rPr>
+              <a:t>Tailwind CSS </a:t>
+            </a:r>
+          </a:p>
+          <a:p>
+            <a:r>
+              <a:rPr lang="fr-BE"/>
+              <a:t>Niche </a:t>
             </a:r>
           </a:p>
           <a:p>
             <a:pPr lvl="1"/>
             <a:r>
               <a:rPr lang="fr-BE"/>
-              <a:t>elasticss</a:t>
+              <a:t>Foundation (Zurb) </a:t>
             </a:r>
           </a:p>
           <a:p>
             <a:pPr lvl="1"/>
             <a:r>
               <a:rPr lang="fr-BE"/>
-              <a:t>Knacss</a:t>
+              <a:t>Knacss (français)</a:t>
             </a:r>
           </a:p>
           <a:p>
             <a:pPr lvl="1"/>
             <a:r>
               <a:rPr lang="fr-BE"/>
-              <a:t>Blueprint</a:t>
+              <a:t>inuitcss (avancé)</a:t>
+            </a:r>
+          </a:p>
+          <a:p>
+            <a:r>
+              <a:rPr lang="fr-BE"/>
+              <a:t>A suivre</a:t>
             </a:r>
           </a:p>
           <a:p>
             <a:pPr lvl="1"/>
             <a:r>
               <a:rPr lang="fr-BE"/>
-              <a:t>960 Grid System</a:t>
+              <a:t>Bulma</a:t>
             </a:r>
           </a:p>
           <a:p>
             <a:pPr lvl="1"/>
             <a:r>
               <a:rPr lang="fr-BE"/>
-              <a:t>YUI</a:t>
-            </a:r>
-          </a:p>
-          <a:p>
-            <a:pPr lvl="1"/>
-            <a:r>
-              <a:rPr lang="fr-BE"/>
-              <a:t>52Framework</a:t>
-            </a:r>
-          </a:p>
-          <a:p>
-            <a:pPr lvl="1"/>
-            <a:r>
-              <a:rPr lang="fr-BE"/>
-              <a:t>inuitcss</a:t>
-            </a:r>
-          </a:p>
-          <a:p>
-            <a:pPr lvl="1"/>
-            <a:r>
-              <a:rPr lang="fr-BE"/>
-              <a:t>elements</a:t>
-            </a:r>
-          </a:p>
-          <a:p>
-            <a:pPr lvl="1"/>
-            <a:r>
-              <a:rPr lang="fr-BE"/>
-              <a:t>BlueTrip</a:t>
-            </a:r>
-          </a:p>
-          <a:p>
-            <a:pPr lvl="1"/>
-            <a:r>
-              <a:rPr lang="fr-BE"/>
-              <a:t>ez-css …</a:t>
+              <a:t>Material UI</a:t>
+            </a:r>
+          </a:p>
+          <a:p>
+            <a:pPr lvl="2"/>
+            <a:r>
+              <a:rPr lang="fr-BE"/>
+              <a:t>intégration Angular, React, Vue.js</a:t>
             </a:r>
           </a:p>
         </p:txBody>
@@ -14087,42 +14606,30 @@
           <a:lstStyle/>
           <a:p>
             <a:r>
-              <a:rPr lang="fr-BE"/>
+              <a:rPr lang="fr-BE">
+                <a:hlinkClick r:id="rId2"/>
+              </a:rPr>
               <a:t>APC Pédagogie</a:t>
             </a:r>
-          </a:p>
-          <a:p>
-            <a:pPr lvl="1"/>
-            <a:r>
-              <a:rPr lang="fr-BE"/>
-              <a:t>https://apcpedagogie.com/cours-et-tutoriels/les_cours/cours-de-programmation/le-bootstrap/</a:t>
-            </a:r>
-          </a:p>
-          <a:p>
-            <a:r>
-              <a:rPr lang="fr-BE"/>
+            <a:endParaRPr lang="fr-BE"/>
+          </a:p>
+          <a:p>
+            <a:r>
+              <a:rPr lang="fr-BE">
+                <a:hlinkClick r:id="rId3"/>
+              </a:rPr>
               <a:t>Get started with Bootstrap</a:t>
             </a:r>
-          </a:p>
-          <a:p>
-            <a:pPr lvl="1"/>
-            <a:r>
-              <a:rPr lang="fr-BE"/>
-              <a:t>https://getbootstrap.com/docs/5.2/getting-started/introduction/</a:t>
-            </a:r>
-          </a:p>
-          <a:p>
-            <a:r>
-              <a:rPr lang="fr-BE"/>
+            <a:endParaRPr lang="fr-BE"/>
+          </a:p>
+          <a:p>
+            <a:r>
+              <a:rPr lang="fr-BE">
+                <a:hlinkClick r:id="rId4"/>
+              </a:rPr>
               <a:t>W3Schools</a:t>
             </a:r>
-          </a:p>
-          <a:p>
-            <a:pPr lvl="1"/>
-            <a:r>
-              <a:rPr lang="fr-BE"/>
-              <a:t>https://www.w3schools.com/bootstrap/</a:t>
-            </a:r>
+            <a:endParaRPr lang="fr-BE"/>
           </a:p>
         </p:txBody>
       </p:sp>
@@ -14255,7 +14762,7 @@
               <a:buNone/>
             </a:pPr>
             <a:r>
-              <a:rPr lang="fr-BE" sz="2400" b="1">
+              <a:rPr lang="fr-BE" sz="2800" b="1">
                 <a:solidFill>
                   <a:schemeClr val="accent6">
                     <a:lumMod val="50000"/>
@@ -14272,7 +14779,7 @@
               <a:buNone/>
             </a:pPr>
             <a:r>
-              <a:rPr lang="fr-BE" sz="2400" b="1">
+              <a:rPr lang="fr-BE" b="1">
                 <a:solidFill>
                   <a:schemeClr val="accent6">
                     <a:lumMod val="50000"/>
@@ -14289,7 +14796,7 @@
               <a:buNone/>
             </a:pPr>
             <a:r>
-              <a:rPr lang="fr-BE" sz="2400" b="1">
+              <a:rPr lang="fr-BE" b="1">
                 <a:solidFill>
                   <a:schemeClr val="accent6">
                     <a:lumMod val="50000"/>
@@ -14298,41 +14805,7 @@
                 <a:latin typeface="Courier New" panose="02070309020205020404" pitchFamily="49" charset="0"/>
                 <a:cs typeface="Courier New" panose="02070309020205020404" pitchFamily="49" charset="0"/>
               </a:rPr>
-              <a:t>rel="stylesheet"   </a:t>
-            </a:r>
-          </a:p>
-          <a:p>
-            <a:pPr marL="914377" lvl="2" indent="0">
-              <a:buNone/>
-            </a:pPr>
-            <a:r>
-              <a:rPr lang="fr-BE" sz="2400" b="1">
-                <a:solidFill>
-                  <a:schemeClr val="accent6">
-                    <a:lumMod val="50000"/>
-                  </a:schemeClr>
-                </a:solidFill>
-                <a:latin typeface="Courier New" panose="02070309020205020404" pitchFamily="49" charset="0"/>
-                <a:cs typeface="Courier New" panose="02070309020205020404" pitchFamily="49" charset="0"/>
-              </a:rPr>
-              <a:t>integrity="sha384-rbsA2VBKQhggwzxH7pPCaAqO46MgnOM80zW1RWuH61DGLwZJEdK2Kadq2F9CUG65"  </a:t>
-            </a:r>
-          </a:p>
-          <a:p>
-            <a:pPr marL="914377" lvl="2" indent="0">
-              <a:buNone/>
-            </a:pPr>
-            <a:r>
-              <a:rPr lang="fr-BE" sz="2400" b="1">
-                <a:solidFill>
-                  <a:schemeClr val="accent6">
-                    <a:lumMod val="50000"/>
-                  </a:schemeClr>
-                </a:solidFill>
-                <a:latin typeface="Courier New" panose="02070309020205020404" pitchFamily="49" charset="0"/>
-                <a:cs typeface="Courier New" panose="02070309020205020404" pitchFamily="49" charset="0"/>
-              </a:rPr>
-              <a:t>crossorigin="anonymous"&gt;</a:t>
+              <a:t>rel="stylesheet" &gt;</a:t>
             </a:r>
           </a:p>
           <a:p>
@@ -14466,85 +14939,73 @@
               <a:buNone/>
             </a:pPr>
             <a:r>
-              <a:rPr lang="fr-BE" sz="2400" b="1">
-                <a:solidFill>
-                  <a:schemeClr val="accent6">
-                    <a:lumMod val="50000"/>
-                  </a:schemeClr>
-                </a:solidFill>
-                <a:latin typeface="Courier New" panose="02070309020205020404" pitchFamily="49" charset="0"/>
-                <a:cs typeface="Courier New" panose="02070309020205020404" pitchFamily="49" charset="0"/>
-              </a:rPr>
-              <a:t> &lt;link</a:t>
+              <a:rPr lang="fr-BE" sz="2800">
+                <a:solidFill>
+                  <a:srgbClr val="996633"/>
+                </a:solidFill>
+                <a:latin typeface="Consolas" panose="020B0609020204030204" pitchFamily="49" charset="0"/>
+              </a:rPr>
+              <a:t>&lt;link</a:t>
+            </a:r>
+            <a:br>
+              <a:rPr lang="fr-BE" sz="2800">
+                <a:solidFill>
+                  <a:srgbClr val="996633"/>
+                </a:solidFill>
+                <a:latin typeface="Consolas" panose="020B0609020204030204" pitchFamily="49" charset="0"/>
+              </a:rPr>
+            </a:br>
+            <a:r>
+              <a:rPr lang="fr-BE" sz="2800">
+                <a:solidFill>
+                  <a:srgbClr val="996633"/>
+                </a:solidFill>
+                <a:latin typeface="Consolas" panose="020B0609020204030204" pitchFamily="49" charset="0"/>
+              </a:rPr>
+              <a:t>	href="https://cdn.jsdelivr.net/npm/bootstrap@5.3.8/dist/css/bootstrap.min.css" 	rel="stylesheet" 	</a:t>
+            </a:r>
+          </a:p>
+          <a:p>
+            <a:pPr marL="457189" lvl="1" indent="0">
+              <a:buNone/>
+            </a:pPr>
+            <a:r>
+              <a:rPr lang="fr-BE" sz="2800">
+                <a:solidFill>
+                  <a:srgbClr val="996633"/>
+                </a:solidFill>
+                <a:latin typeface="Consolas" panose="020B0609020204030204" pitchFamily="49" charset="0"/>
+              </a:rPr>
+              <a:t>	integrity="sha384-sRIl4kxILFvY47J16cr9ZwB07vP4J8+LH7qKQnuqkuIAvNWLzeN8tE5YBujZqJLB" </a:t>
+            </a:r>
+          </a:p>
+          <a:p>
+            <a:pPr marL="457189" lvl="1" indent="0">
+              <a:buNone/>
+            </a:pPr>
+            <a:r>
+              <a:rPr lang="fr-BE" sz="2800">
+                <a:solidFill>
+                  <a:srgbClr val="996633"/>
+                </a:solidFill>
+                <a:latin typeface="Consolas" panose="020B0609020204030204" pitchFamily="49" charset="0"/>
+              </a:rPr>
+              <a:t>	crossorigin="anonymous" &gt;</a:t>
             </a:r>
           </a:p>
           <a:p>
             <a:pPr marL="914377" lvl="2" indent="0">
               <a:buNone/>
             </a:pPr>
-            <a:r>
-              <a:rPr lang="fr-BE" sz="2400" b="1">
-                <a:solidFill>
-                  <a:schemeClr val="accent6">
-                    <a:lumMod val="50000"/>
-                  </a:schemeClr>
-                </a:solidFill>
-                <a:latin typeface="Courier New" panose="02070309020205020404" pitchFamily="49" charset="0"/>
-                <a:cs typeface="Courier New" panose="02070309020205020404" pitchFamily="49" charset="0"/>
-              </a:rPr>
-              <a:t>href="https://cdn.jsdelivr.net/npm/bootstrap@5.1.3/dist/css/bootstrap.min.css" </a:t>
-            </a:r>
-          </a:p>
-          <a:p>
-            <a:pPr marL="914377" lvl="2" indent="0">
-              <a:buNone/>
-            </a:pPr>
-            <a:r>
-              <a:rPr lang="fr-BE" sz="2400" b="1">
-                <a:solidFill>
-                  <a:schemeClr val="accent6">
-                    <a:lumMod val="50000"/>
-                  </a:schemeClr>
-                </a:solidFill>
-                <a:latin typeface="Courier New" panose="02070309020205020404" pitchFamily="49" charset="0"/>
-                <a:cs typeface="Courier New" panose="02070309020205020404" pitchFamily="49" charset="0"/>
-              </a:rPr>
-              <a:t>rel="stylesheet" </a:t>
-            </a:r>
-          </a:p>
-          <a:p>
-            <a:pPr marL="914377" lvl="2" indent="0">
-              <a:buNone/>
-            </a:pPr>
-            <a:r>
-              <a:rPr lang="fr-BE" sz="2400" b="1">
-                <a:solidFill>
-                  <a:schemeClr val="accent6">
-                    <a:lumMod val="50000"/>
-                  </a:schemeClr>
-                </a:solidFill>
-                <a:latin typeface="Courier New" panose="02070309020205020404" pitchFamily="49" charset="0"/>
-                <a:cs typeface="Courier New" panose="02070309020205020404" pitchFamily="49" charset="0"/>
-              </a:rPr>
-              <a:t>integrity="sha384-1BmE4kWBq78iYhFldvKuhfTAU6auU8tT94WrHftjDbrCEXSU1oBoqyl2QvZ6jIW3"</a:t>
-            </a:r>
-          </a:p>
-          <a:p>
-            <a:pPr marL="914377" lvl="2" indent="0">
-              <a:buNone/>
-            </a:pPr>
-            <a:r>
-              <a:rPr lang="fr-BE" sz="2400" b="1">
-                <a:solidFill>
-                  <a:schemeClr val="accent6">
-                    <a:lumMod val="50000"/>
-                  </a:schemeClr>
-                </a:solidFill>
-                <a:latin typeface="Courier New" panose="02070309020205020404" pitchFamily="49" charset="0"/>
-                <a:cs typeface="Courier New" panose="02070309020205020404" pitchFamily="49" charset="0"/>
-              </a:rPr>
-              <a:t>crossorigin="anonymous"&gt;</a:t>
-            </a:r>
+            <a:endParaRPr lang="fr-BE" sz="2400" b="1">
+              <a:solidFill>
+                <a:schemeClr val="accent6">
+                  <a:lumMod val="50000"/>
+                </a:schemeClr>
+              </a:solidFill>
+              <a:latin typeface="Courier New" panose="02070309020205020404" pitchFamily="49" charset="0"/>
+              <a:cs typeface="Courier New" panose="02070309020205020404" pitchFamily="49" charset="0"/>
+            </a:endParaRPr>
           </a:p>
           <a:p>
             <a:pPr lvl="1"/>
